--- a/outputs/produkte/mama-ceo/03-praesentationen/saeule-2/05-lektion-2-5.pptx
+++ b/outputs/produkte/mama-ceo/03-praesentationen/saeule-2/05-lektion-2-5.pptx
@@ -4,6 +4,9 @@
   <p:sldMasterIdLst>
     <p:sldMasterId id="2147483648" r:id="rId1"/>
   </p:sldMasterIdLst>
+  <p:notesMasterIdLst>
+    <p:notesMasterId r:id="rId14"/>
+  </p:notesMasterIdLst>
   <p:sldIdLst>
     <p:sldId id="256" r:id="rId2"/>
     <p:sldId id="257" r:id="rId3"/>
@@ -18,10 +21,7 @@
     <p:sldId id="266" r:id="rId12"/>
     <p:sldId id="267" r:id="rId13"/>
   </p:sldIdLst>
-  <p:notesMasterIdLst>
-    <p:notesMasterId r:id="rId14"/>
-  </p:notesMasterIdLst>
-  <p:sldSz cx="9144000" cy="5143500"/>
+  <p:sldSz cx="9144000" cy="5143500" type="screen16x9"/>
   <p:notesSz cx="5143500" cy="9144000"/>
   <p:defaultTextStyle>
     <a:lvl1pPr marL="0" algn="l" defTabSz="914400" rtl="0" eaLnBrk="1" latinLnBrk="0" hangingPunct="1">
@@ -115,6 +115,11 @@
       </a:defRPr>
     </a:lvl9pPr>
   </p:defaultTextStyle>
+  <p:extLst>
+    <p:ext uri="{EFAFB233-063F-42B5-8137-9DF3F51BA10A}">
+      <p15:sldGuideLst xmlns:p15="http://schemas.microsoft.com/office/powerpoint/2012/main"/>
+    </p:ext>
+  </p:extLst>
 </p:presentation>
 </file>
 
@@ -140,234 +145,10 @@
           <a:chExt cx="0" cy="0"/>
         </a:xfrm>
       </p:grpSpPr>
-      <p:sp>
-        <p:nvSpPr>
-          <p:cNvPr id="2" name="Header Placeholder 1"/>
-          <p:cNvSpPr>
-            <a:spLocks noGrp="1"/>
-          </p:cNvSpPr>
-          <p:nvPr>
-            <p:ph type="hdr" sz="quarter"/>
-          </p:nvPr>
-        </p:nvSpPr>
-        <p:spPr>
-          <a:xfrm>
-            <a:off x="0" y="0"/>
-            <a:ext cx="2971800" cy="458788"/>
-          </a:xfrm>
-          <a:prstGeom prst="rect">
-            <a:avLst/>
-          </a:prstGeom>
-        </p:spPr>
-        <p:txBody>
-          <a:bodyPr vert="horz" lIns="91440" tIns="45720" rIns="91440" bIns="45720" rtlCol="0"/>
-          <a:lstStyle>
-            <a:lvl1pPr algn="l">
-              <a:defRPr sz="1200"/>
-            </a:lvl1pPr>
-          </a:lstStyle>
-          <a:p>
-            <a:endParaRPr lang="en-US"/>
-          </a:p>
-        </p:txBody>
-      </p:sp>
-      <p:sp>
-        <p:nvSpPr>
-          <p:cNvPr id="3" name="Date Placeholder 2"/>
-          <p:cNvSpPr>
-            <a:spLocks noGrp="1"/>
-          </p:cNvSpPr>
-          <p:nvPr>
-            <p:ph type="dt" idx="1"/>
-          </p:nvPr>
-        </p:nvSpPr>
-        <p:spPr>
-          <a:xfrm>
-            <a:off x="3884613" y="0"/>
-            <a:ext cx="2971800" cy="458788"/>
-          </a:xfrm>
-          <a:prstGeom prst="rect">
-            <a:avLst/>
-          </a:prstGeom>
-        </p:spPr>
-        <p:txBody>
-          <a:bodyPr vert="horz" lIns="91440" tIns="45720" rIns="91440" bIns="45720" rtlCol="0"/>
-          <a:lstStyle>
-            <a:lvl1pPr algn="r">
-              <a:defRPr sz="1200"/>
-            </a:lvl1pPr>
-          </a:lstStyle>
-          <a:p>
-            <a:fld id="{5282F153-3F37-0F45-9E97-73ACFA13230C}" type="datetimeFigureOut">
-              <a:rPr lang="en-US"/>
-              <a:t>7/23/19</a:t>
-            </a:fld>
-            <a:endParaRPr lang="en-US"/>
-          </a:p>
-        </p:txBody>
-      </p:sp>
-      <p:sp>
-        <p:nvSpPr>
-          <p:cNvPr id="4" name="Slide Image Placeholder 3"/>
-          <p:cNvSpPr>
-            <a:spLocks noGrp="1" noRot="1" noChangeAspect="1"/>
-          </p:cNvSpPr>
-          <p:nvPr>
-            <p:ph type="sldImg" idx="2"/>
-          </p:nvPr>
-        </p:nvSpPr>
-        <p:spPr>
-          <a:xfrm>
-            <a:off x="685800" y="1143000"/>
-            <a:ext cx="5486400" cy="3086100"/>
-          </a:xfrm>
-          <a:prstGeom prst="rect">
-            <a:avLst/>
-          </a:prstGeom>
-          <a:noFill/>
-          <a:ln w="12700">
-            <a:solidFill>
-              <a:prstClr val="black"/>
-            </a:solidFill>
-          </a:ln>
-        </p:spPr>
-        <p:txBody>
-          <a:bodyPr vert="horz" lIns="91440" tIns="45720" rIns="91440" bIns="45720" rtlCol="0" anchor="ctr"/>
-          <a:lstStyle/>
-          <a:p>
-            <a:endParaRPr lang="en-US"/>
-          </a:p>
-        </p:txBody>
-      </p:sp>
-      <p:sp>
-        <p:nvSpPr>
-          <p:cNvPr id="5" name="Notes Placeholder 4"/>
-          <p:cNvSpPr>
-            <a:spLocks noGrp="1"/>
-          </p:cNvSpPr>
-          <p:nvPr>
-            <p:ph type="body" sz="quarter" idx="3"/>
-          </p:nvPr>
-        </p:nvSpPr>
-        <p:spPr>
-          <a:xfrm>
-            <a:off x="685800" y="4400550"/>
-            <a:ext cx="5486400" cy="3600450"/>
-          </a:xfrm>
-          <a:prstGeom prst="rect">
-            <a:avLst/>
-          </a:prstGeom>
-        </p:spPr>
-        <p:txBody>
-          <a:bodyPr vert="horz" lIns="91440" tIns="45720" rIns="91440" bIns="45720" rtlCol="0"/>
-          <a:lstStyle/>
-          <a:p>
-            <a:pPr lvl="0"/>
-            <a:r>
-              <a:rPr lang="en-US"/>
-              <a:t>Click to edit Master text styles</a:t>
-            </a:r>
-          </a:p>
-          <a:p>
-            <a:pPr lvl="1"/>
-            <a:r>
-              <a:rPr lang="en-US"/>
-              <a:t>Second level</a:t>
-            </a:r>
-          </a:p>
-          <a:p>
-            <a:pPr lvl="2"/>
-            <a:r>
-              <a:rPr lang="en-US"/>
-              <a:t>Third level</a:t>
-            </a:r>
-          </a:p>
-          <a:p>
-            <a:pPr lvl="3"/>
-            <a:r>
-              <a:rPr lang="en-US"/>
-              <a:t>Fourth level</a:t>
-            </a:r>
-          </a:p>
-          <a:p>
-            <a:pPr lvl="4"/>
-            <a:r>
-              <a:rPr lang="en-US"/>
-              <a:t>Fifth level</a:t>
-            </a:r>
-          </a:p>
-        </p:txBody>
-      </p:sp>
-      <p:sp>
-        <p:nvSpPr>
-          <p:cNvPr id="6" name="Footer Placeholder 5"/>
-          <p:cNvSpPr>
-            <a:spLocks noGrp="1"/>
-          </p:cNvSpPr>
-          <p:nvPr>
-            <p:ph type="ftr" sz="quarter" idx="4"/>
-          </p:nvPr>
-        </p:nvSpPr>
-        <p:spPr>
-          <a:xfrm>
-            <a:off x="0" y="8685213"/>
-            <a:ext cx="2971800" cy="458787"/>
-          </a:xfrm>
-          <a:prstGeom prst="rect">
-            <a:avLst/>
-          </a:prstGeom>
-        </p:spPr>
-        <p:txBody>
-          <a:bodyPr vert="horz" lIns="91440" tIns="45720" rIns="91440" bIns="45720" rtlCol="0" anchor="b"/>
-          <a:lstStyle>
-            <a:lvl1pPr algn="l">
-              <a:defRPr sz="1200"/>
-            </a:lvl1pPr>
-          </a:lstStyle>
-          <a:p>
-            <a:endParaRPr lang="en-US"/>
-          </a:p>
-        </p:txBody>
-      </p:sp>
-      <p:sp>
-        <p:nvSpPr>
-          <p:cNvPr id="7" name="Slide Number Placeholder 6"/>
-          <p:cNvSpPr>
-            <a:spLocks noGrp="1"/>
-          </p:cNvSpPr>
-          <p:nvPr>
-            <p:ph type="sldNum" sz="quarter" idx="5"/>
-          </p:nvPr>
-        </p:nvSpPr>
-        <p:spPr>
-          <a:xfrm>
-            <a:off x="3884613" y="8685213"/>
-            <a:ext cx="2971800" cy="458787"/>
-          </a:xfrm>
-          <a:prstGeom prst="rect">
-            <a:avLst/>
-          </a:prstGeom>
-        </p:spPr>
-        <p:txBody>
-          <a:bodyPr vert="horz" lIns="91440" tIns="45720" rIns="91440" bIns="45720" rtlCol="0" anchor="b"/>
-          <a:lstStyle>
-            <a:lvl1pPr algn="r">
-              <a:defRPr sz="1200"/>
-            </a:lvl1pPr>
-          </a:lstStyle>
-          <a:p>
-            <a:fld id="{CE5E9CC1-C706-0F49-92D6-E571CC5EEA8F}" type="slidenum">
-              <a:rPr lang="en-US"/>
-              <a:t>‹#›</a:t>
-            </a:fld>
-            <a:endParaRPr lang="en-US"/>
-          </a:p>
-        </p:txBody>
-      </p:sp>
     </p:spTree>
     <p:extLst>
       <p:ext uri="{BB962C8B-B14F-4D97-AF65-F5344CB8AC3E}">
-        <p14:creationId xmlns:p14="http://schemas.microsoft.com/office/powerpoint/2010/main" val="1024086991"/>
+        <p14:creationId xmlns:p14="http://schemas.microsoft.com/office/powerpoint/2010/main" val="1178090625"/>
       </p:ext>
     </p:extLst>
   </p:cSld>
@@ -516,7 +297,6 @@
               <a:t>Intro:
 „Säule 1 hat dir Business-Rhythmus gegeben. Jetzt fügen wir den Haushalt dazu — damit dein Wochenrhythmus ein KOMPLETTES Bild ist. Kein Vergessen, kein Planlos-Sein um 17 Uhr."</a:t>
             </a:r>
-            <a:endParaRPr lang="en-US" dirty="0"/>
           </a:p>
         </p:txBody>
       </p:sp>
@@ -605,7 +385,6 @@
               <a:t>Sprechnotiz:
 „Wichtige Botschaft: das hier ist kein Perfektion-Programm. Wäsche ist eh wieder dreckig in 2 Tagen. Boden ist eh wieder krümelig nach dem Abendessen. Realistischer Standard heisst: 80% sauber ist gut genug. Niemand kommt überraschend zur Inspektion."</a:t>
             </a:r>
-            <a:endParaRPr lang="en-US" dirty="0"/>
           </a:p>
         </p:txBody>
       </p:sp>
@@ -694,7 +473,6 @@
               <a:t>Outro:
 „Im Arbeitsblatt: das 7-Fragen-Quiz mit deiner Auswertung. Dein Haushalts-Wochenplan Mo-So. Die Familien-Beitrags-Tabelle für alle in deinem Haushalt."</a:t>
             </a:r>
-            <a:endParaRPr lang="en-US" dirty="0"/>
           </a:p>
         </p:txBody>
       </p:sp>
@@ -783,7 +561,6 @@
               <a:t>Sprechnotiz:
 „In der letzten Lektion von Säule 2 schauen wir die häufigsten Blockaden an die Mama-CEOs in den ersten 8 Wochen erleben — und installieren dein Sonntag-Reset. Bis dann."</a:t>
             </a:r>
-            <a:endParaRPr lang="en-US" dirty="0"/>
           </a:p>
         </p:txBody>
       </p:sp>
@@ -872,7 +649,6 @@
               <a:t>Sprechnotiz:
 „Ein unstrukturierter Haushalt frisst dich täglich auf. Du läufst von Küche zu Wäsche zu Wohnzimmer zu Spielzeug-Aufräumen — ohne Plan. 2 Stunden vergehen. Mit Plan: 30-45 Min am Tag, und du fühlst dich nicht ‚nie fertig'. Das ist der Hebel."</a:t>
             </a:r>
-            <a:endParaRPr lang="en-US" dirty="0"/>
           </a:p>
         </p:txBody>
       </p:sp>
@@ -961,7 +737,6 @@
               <a:t>Sprechnotiz:
 „Bevor wir Haushalt planen — finden wir DEINEN Typ. Weil ein Notion-Mensch leidet mit Wandkalender. Ein Analog-Mensch leidet mit Notion. Drei Typen: Analog &amp; achtsam. Digital &amp; pragmatisch. Struktur-Lover. Welcher bist du?"</a:t>
             </a:r>
-            <a:endParaRPr lang="en-US" dirty="0"/>
           </a:p>
         </p:txBody>
       </p:sp>
@@ -1050,7 +825,6 @@
               <a:t>Sprechnotiz:
 „Wir machen jetzt einen kurzen Test aus meinem Familienorga-for-real-Kurs. 7 Fragen. Du antwortest aus dem Bauch raus. Am Ende zählst du wieviel A, wieviel B, wieviel C."</a:t>
             </a:r>
-            <a:endParaRPr lang="en-US" dirty="0"/>
           </a:p>
         </p:txBody>
       </p:sp>
@@ -1139,7 +913,6 @@
               <a:t>Sprechnotiz:
 „Frage eins — wie planst du aktuell deine Woche? A: Notizzettel, Kalender und Stift — alles analog. B: Handy-Kalender oder App — eher basic. C: Tools wie Trello, Notion oder ein komplexes System. Geh durch alle 7 Fragen in deinem Arbeitsblatt — eine Frage 30 Sekunden, kein langes Überlegen."</a:t>
             </a:r>
-            <a:endParaRPr lang="en-US" dirty="0"/>
           </a:p>
         </p:txBody>
       </p:sp>
@@ -1228,7 +1001,6 @@
               <a:t>Sprechnotiz:
 „Auswertung. Meistens A: du bist analog &amp; achtsam. Du brauchst was zum Anfassen — Wandkalender, Whiteboard in der Küche, Listen auf dem Tisch. Meistens B: du bist digital &amp; pragmatisch. Familienkalender-App, FamilyWall, Google Kalender für alle. Meistens C: Struktur-Lover, du baust dir dein Notion oder Trello mit Boards. Mix möglich — z.B. Wandkalender + Familien-Chat-App."</a:t>
             </a:r>
-            <a:endParaRPr lang="en-US" dirty="0"/>
           </a:p>
         </p:txBody>
       </p:sp>
@@ -1317,7 +1089,6 @@
               <a:t>Sprechnotiz:
 „Jetzt dein Wochen-Haushalts-Plan. Beispiel-Verteilung: Mo Wäsche-Tag (anfangen). Di Wocheneinkauf. Mi Bäder. Do Wäsche fertigstellen + zusammenlegen (oder NICHT-zusammenlegen, je nach Standard). Fr Wohnung-Tiefenputz. Sa Garten / Saisonales. So FREI — kein Haushalt am Sonntag. Wichtig: max. 1 grosse Haushaltsaufgabe pro Tag. Mehr nicht. Alles andere geht im Vorbeigehen."</a:t>
             </a:r>
-            <a:endParaRPr lang="en-US" dirty="0"/>
           </a:p>
         </p:txBody>
       </p:sp>
@@ -1406,7 +1177,6 @@
               <a:t>Sprechnotiz:
 „Jetzt verbinden wir's mit deinem Business-Rhythmus aus Säule 1. Beispiel: Mo Vormittag Business (Strategie), Nachmittag Haushalt (Wäsche). Keine Überschneidungen. Wenn beides gleichzeitig läuft, leiden beide. Trag das in deinem Arbeitsblatt ein."</a:t>
             </a:r>
-            <a:endParaRPr lang="en-US" dirty="0"/>
           </a:p>
         </p:txBody>
       </p:sp>
@@ -1495,7 +1265,6 @@
               <a:t>Sprechnotiz:
 „Du machst NICHT alles selbst. Familien-Beitrags-Tabelle. Mama: Plan + Verteilung + grosse Aufgaben. Papa: Aufgabe X täglich + Aufgabe Y wöchentlich. Kind ab 6: Tischabräumen, Schulranzen-Vorbereitung. Kind ab 10: Wäschen aufhängen, Müll runter. Kind ab 13: Eine Mahlzeit pro Woche kochen. Klare Verantwortung pro Person."</a:t>
             </a:r>
-            <a:endParaRPr lang="en-US" dirty="0"/>
           </a:p>
         </p:txBody>
       </p:sp>
@@ -1568,6 +1337,11 @@
 <file path=ppt/slideMasters/slideMaster1.xml><?xml version="1.0" encoding="utf-8"?>
 <p:sldMaster xmlns:a="http://schemas.openxmlformats.org/drawingml/2006/main" xmlns:r="http://schemas.openxmlformats.org/officeDocument/2006/relationships" xmlns:p="http://schemas.openxmlformats.org/presentationml/2006/main">
   <p:cSld>
+    <p:bg>
+      <p:bgRef idx="1001">
+        <a:schemeClr val="bg1"/>
+      </p:bgRef>
+    </p:bg>
     <p:spTree>
       <p:nvGrpSpPr>
         <p:cNvPr id="1" name=""/>
@@ -1850,6 +1624,7 @@
         <a:solidFill>
           <a:srgbClr val="F1ECDD"/>
         </a:solidFill>
+        <a:effectLst/>
       </p:bgPr>
     </p:bg>
     <p:spTree>
@@ -1894,6 +1669,13 @@
             <a:prstDash val="solid"/>
           </a:ln>
         </p:spPr>
+        <p:txBody>
+          <a:bodyPr/>
+          <a:lstStyle/>
+          <a:p>
+            <a:endParaRPr lang="de-CH"/>
+          </a:p>
+        </p:txBody>
       </p:sp>
       <p:sp>
         <p:nvSpPr>
@@ -1916,11 +1698,11 @@
           <a:bodyPr wrap="square" rtlCol="0" anchor="ctr"/>
           <a:lstStyle/>
           <a:p>
-            <a:pPr indent="0" marL="0">
-              <a:buNone/>
-            </a:pPr>
-            <a:r>
-              <a:rPr lang="en-US" sz="1100" b="1" spc="400" kern="0" dirty="0">
+            <a:pPr marL="0" indent="0">
+              <a:buNone/>
+            </a:pPr>
+            <a:r>
+              <a:rPr lang="en-US" sz="1100" b="1" kern="0" spc="400" dirty="0">
                 <a:solidFill>
                   <a:srgbClr val="DC822E"/>
                 </a:solidFill>
@@ -1960,6 +1742,13 @@
             <a:prstDash val="solid"/>
           </a:ln>
         </p:spPr>
+        <p:txBody>
+          <a:bodyPr/>
+          <a:lstStyle/>
+          <a:p>
+            <a:endParaRPr lang="de-CH"/>
+          </a:p>
+        </p:txBody>
       </p:sp>
       <p:sp>
         <p:nvSpPr>
@@ -1982,7 +1771,7 @@
           <a:bodyPr wrap="square" lIns="0" tIns="0" rIns="0" bIns="0" rtlCol="0" anchor="t"/>
           <a:lstStyle/>
           <a:p>
-            <a:pPr indent="0" marL="0">
+            <a:pPr marL="0" indent="0">
               <a:buNone/>
             </a:pPr>
             <a:r>
@@ -1999,7 +1788,7 @@
             <a:endParaRPr lang="en-US" sz="4800" dirty="0"/>
           </a:p>
           <a:p>
-            <a:pPr indent="0" marL="0">
+            <a:pPr marL="0" indent="0">
               <a:buNone/>
             </a:pPr>
             <a:r>
@@ -2038,7 +1827,7 @@
           <a:bodyPr wrap="square" lIns="0" tIns="0" rIns="0" bIns="0" rtlCol="0" anchor="t"/>
           <a:lstStyle/>
           <a:p>
-            <a:pPr indent="0" marL="0">
+            <a:pPr marL="0" indent="0">
               <a:buNone/>
             </a:pPr>
             <a:r>
@@ -2055,7 +1844,7 @@
             <a:endParaRPr lang="en-US" sz="1800" dirty="0"/>
           </a:p>
           <a:p>
-            <a:pPr indent="0" marL="0">
+            <a:pPr marL="0" indent="0">
               <a:buNone/>
             </a:pPr>
             <a:r>
@@ -2072,7 +1861,7 @@
             <a:endParaRPr lang="en-US" sz="1800" dirty="0"/>
           </a:p>
           <a:p>
-            <a:pPr indent="0" marL="0">
+            <a:pPr marL="0" indent="0">
               <a:buNone/>
             </a:pPr>
             <a:r>
@@ -2111,7 +1900,7 @@
           <a:bodyPr wrap="square" rtlCol="0" anchor="ctr"/>
           <a:lstStyle/>
           <a:p>
-            <a:pPr indent="0" marL="0">
+            <a:pPr marL="0" indent="0">
               <a:buNone/>
             </a:pPr>
             <a:r>
@@ -2150,7 +1939,7 @@
           <a:bodyPr wrap="square" rtlCol="0" anchor="ctr"/>
           <a:lstStyle/>
           <a:p>
-            <a:pPr algn="r" indent="0" marL="0">
+            <a:pPr marL="0" indent="0" algn="r">
               <a:buNone/>
             </a:pPr>
             <a:r>
@@ -2184,6 +1973,7 @@
         <a:solidFill>
           <a:srgbClr val="12828C"/>
         </a:solidFill>
+        <a:effectLst/>
       </p:bgPr>
     </p:bg>
     <p:spTree>
@@ -2208,7 +1998,7 @@
         </p:nvSpPr>
         <p:spPr>
           <a:xfrm>
-            <a:off x="548640" y="1188720"/>
+            <a:off x="548640" y="416560"/>
             <a:ext cx="8046720" cy="365760"/>
           </a:xfrm>
           <a:prstGeom prst="rect">
@@ -2221,11 +2011,11 @@
           <a:bodyPr wrap="square" rtlCol="0" anchor="ctr"/>
           <a:lstStyle/>
           <a:p>
-            <a:pPr algn="ctr" indent="0" marL="0">
-              <a:buNone/>
-            </a:pPr>
-            <a:r>
-              <a:rPr lang="en-US" sz="1100" b="1" spc="400" kern="0" dirty="0">
+            <a:pPr marL="0" indent="0" algn="ctr">
+              <a:buNone/>
+            </a:pPr>
+            <a:r>
+              <a:rPr lang="en-US" sz="1100" b="1" kern="0" spc="400" dirty="0">
                 <a:solidFill>
                   <a:srgbClr val="DC822E"/>
                 </a:solidFill>
@@ -2247,7 +2037,7 @@
         </p:nvSpPr>
         <p:spPr>
           <a:xfrm>
-            <a:off x="4297680" y="1691640"/>
+            <a:off x="4297680" y="845820"/>
             <a:ext cx="548640" cy="36576"/>
           </a:xfrm>
           <a:prstGeom prst="rect">
@@ -2265,6 +2055,13 @@
             <a:prstDash val="solid"/>
           </a:ln>
         </p:spPr>
+        <p:txBody>
+          <a:bodyPr/>
+          <a:lstStyle/>
+          <a:p>
+            <a:endParaRPr lang="de-CH"/>
+          </a:p>
+        </p:txBody>
       </p:sp>
       <p:sp>
         <p:nvSpPr>
@@ -2274,7 +2071,7 @@
         </p:nvSpPr>
         <p:spPr>
           <a:xfrm>
-            <a:off x="548640" y="2011680"/>
+            <a:off x="548640" y="1648460"/>
             <a:ext cx="8046720" cy="2286000"/>
           </a:xfrm>
           <a:prstGeom prst="rect">
@@ -2287,11 +2084,11 @@
           <a:bodyPr wrap="square" lIns="0" tIns="0" rIns="0" bIns="0" rtlCol="0" anchor="ctr"/>
           <a:lstStyle/>
           <a:p>
-            <a:pPr algn="ctr" indent="0" marL="0">
-              <a:buNone/>
-            </a:pPr>
-            <a:r>
-              <a:rPr lang="en-US" sz="3600" b="1" dirty="0">
+            <a:pPr marL="0" indent="0" algn="ctr">
+              <a:buNone/>
+            </a:pPr>
+            <a:r>
+              <a:rPr lang="en-US" sz="2800" b="1" dirty="0">
                 <a:solidFill>
                   <a:srgbClr val="F1ECDD"/>
                 </a:solidFill>
@@ -2301,14 +2098,14 @@
               </a:rPr>
               <a:t>Wäsche ist eh wieder dreckig in 2 Tagen.</a:t>
             </a:r>
-            <a:endParaRPr lang="en-US" sz="3600" dirty="0"/>
-          </a:p>
-          <a:p>
-            <a:pPr algn="ctr" indent="0" marL="0">
-              <a:buNone/>
-            </a:pPr>
-            <a:r>
-              <a:rPr lang="en-US" sz="3600" b="1" dirty="0">
+            <a:endParaRPr lang="en-US" sz="2800" dirty="0"/>
+          </a:p>
+          <a:p>
+            <a:pPr marL="0" indent="0" algn="ctr">
+              <a:buNone/>
+            </a:pPr>
+            <a:r>
+              <a:rPr lang="en-US" sz="2800" b="1" dirty="0">
                 <a:solidFill>
                   <a:srgbClr val="F1ECDD"/>
                 </a:solidFill>
@@ -2318,14 +2115,14 @@
               </a:rPr>
               <a:t>Boden ist eh wieder krümelig nach dem Abendessen.</a:t>
             </a:r>
-            <a:endParaRPr lang="en-US" sz="3600" dirty="0"/>
-          </a:p>
-          <a:p>
-            <a:pPr algn="ctr" indent="0" marL="0">
-              <a:buNone/>
-            </a:pPr>
-            <a:r>
-              <a:rPr lang="en-US" sz="3600" b="1" dirty="0">
+            <a:endParaRPr lang="en-US" sz="2800" dirty="0"/>
+          </a:p>
+          <a:p>
+            <a:pPr marL="0" indent="0" algn="ctr">
+              <a:buNone/>
+            </a:pPr>
+            <a:r>
+              <a:rPr lang="en-US" sz="2800" b="1" dirty="0">
                 <a:solidFill>
                   <a:srgbClr val="F1ECDD"/>
                 </a:solidFill>
@@ -2335,14 +2132,14 @@
               </a:rPr>
               <a:t>80% sauber ist gut genug.</a:t>
             </a:r>
-            <a:endParaRPr lang="en-US" sz="3600" dirty="0"/>
-          </a:p>
-          <a:p>
-            <a:pPr algn="ctr" indent="0" marL="0">
-              <a:buNone/>
-            </a:pPr>
-            <a:r>
-              <a:rPr lang="en-US" sz="3600" b="1" dirty="0">
+            <a:endParaRPr lang="en-US" sz="2800" dirty="0"/>
+          </a:p>
+          <a:p>
+            <a:pPr marL="0" indent="0" algn="ctr">
+              <a:buNone/>
+            </a:pPr>
+            <a:r>
+              <a:rPr lang="en-US" sz="2800" b="1" dirty="0">
                 <a:solidFill>
                   <a:srgbClr val="F1ECDD"/>
                 </a:solidFill>
@@ -2352,7 +2149,7 @@
               </a:rPr>
               <a:t>Niemand kommt überraschend zur Inspektion.</a:t>
             </a:r>
-            <a:endParaRPr lang="en-US" sz="3600" dirty="0"/>
+            <a:endParaRPr lang="en-US" sz="2800" dirty="0"/>
           </a:p>
         </p:txBody>
       </p:sp>
@@ -2377,11 +2174,11 @@
           <a:bodyPr wrap="square" rtlCol="0" anchor="ctr"/>
           <a:lstStyle/>
           <a:p>
-            <a:pPr indent="0" marL="0">
-              <a:buNone/>
-            </a:pPr>
-            <a:r>
-              <a:rPr lang="en-US" sz="900" spc="200" kern="0" dirty="0">
+            <a:pPr marL="0" indent="0">
+              <a:buNone/>
+            </a:pPr>
+            <a:r>
+              <a:rPr lang="en-US" sz="900" kern="0" spc="200" dirty="0">
                 <a:solidFill>
                   <a:srgbClr val="F1ECDD"/>
                 </a:solidFill>
@@ -2416,7 +2213,7 @@
           <a:bodyPr wrap="square" rtlCol="0" anchor="ctr"/>
           <a:lstStyle/>
           <a:p>
-            <a:pPr algn="r" indent="0" marL="0">
+            <a:pPr marL="0" indent="0" algn="r">
               <a:buNone/>
             </a:pPr>
             <a:r>
@@ -2450,6 +2247,7 @@
         <a:solidFill>
           <a:srgbClr val="FFFFFF"/>
         </a:solidFill>
+        <a:effectLst/>
       </p:bgPr>
     </p:bg>
     <p:spTree>
@@ -2487,7 +2285,7 @@
           <a:bodyPr wrap="square" lIns="0" tIns="0" rIns="0" bIns="0" rtlCol="0" anchor="t"/>
           <a:lstStyle/>
           <a:p>
-            <a:pPr indent="0" marL="0">
+            <a:pPr marL="0" indent="0">
               <a:buNone/>
             </a:pPr>
             <a:r>
@@ -2531,6 +2329,13 @@
             <a:prstDash val="solid"/>
           </a:ln>
         </p:spPr>
+        <p:txBody>
+          <a:bodyPr/>
+          <a:lstStyle/>
+          <a:p>
+            <a:endParaRPr lang="de-CH"/>
+          </a:p>
+        </p:txBody>
       </p:sp>
       <p:sp>
         <p:nvSpPr>
@@ -2558,6 +2363,13 @@
             <a:prstDash val="solid"/>
           </a:ln>
         </p:spPr>
+        <p:txBody>
+          <a:bodyPr/>
+          <a:lstStyle/>
+          <a:p>
+            <a:endParaRPr lang="de-CH"/>
+          </a:p>
+        </p:txBody>
       </p:sp>
       <p:sp>
         <p:nvSpPr>
@@ -2580,11 +2392,11 @@
           <a:bodyPr wrap="square" rtlCol="0" anchor="ctr"/>
           <a:lstStyle/>
           <a:p>
-            <a:pPr indent="0" marL="0">
-              <a:buNone/>
-            </a:pPr>
-            <a:r>
-              <a:rPr lang="en-US" sz="1000" b="1" spc="300" kern="0" dirty="0">
+            <a:pPr marL="0" indent="0">
+              <a:buNone/>
+            </a:pPr>
+            <a:r>
+              <a:rPr lang="en-US" sz="1000" b="1" kern="0" spc="300" dirty="0">
                 <a:solidFill>
                   <a:srgbClr val="0D6168"/>
                 </a:solidFill>
@@ -2619,7 +2431,7 @@
           <a:bodyPr wrap="square" lIns="0" tIns="0" rIns="0" bIns="0" rtlCol="0" anchor="t"/>
           <a:lstStyle/>
           <a:p>
-            <a:pPr indent="0" marL="0">
+            <a:pPr marL="0" indent="0">
               <a:buNone/>
             </a:pPr>
             <a:r>
@@ -2769,6 +2581,13 @@
             <a:prstDash val="solid"/>
           </a:ln>
         </p:spPr>
+        <p:txBody>
+          <a:bodyPr/>
+          <a:lstStyle/>
+          <a:p>
+            <a:endParaRPr lang="de-CH"/>
+          </a:p>
+        </p:txBody>
       </p:sp>
       <p:sp>
         <p:nvSpPr>
@@ -2796,6 +2615,13 @@
             <a:prstDash val="solid"/>
           </a:ln>
         </p:spPr>
+        <p:txBody>
+          <a:bodyPr/>
+          <a:lstStyle/>
+          <a:p>
+            <a:endParaRPr lang="de-CH"/>
+          </a:p>
+        </p:txBody>
       </p:sp>
       <p:sp>
         <p:nvSpPr>
@@ -2818,11 +2644,11 @@
           <a:bodyPr wrap="square" rtlCol="0" anchor="ctr"/>
           <a:lstStyle/>
           <a:p>
-            <a:pPr indent="0" marL="0">
-              <a:buNone/>
-            </a:pPr>
-            <a:r>
-              <a:rPr lang="en-US" sz="1000" b="1" spc="300" kern="0" dirty="0">
+            <a:pPr marL="0" indent="0">
+              <a:buNone/>
+            </a:pPr>
+            <a:r>
+              <a:rPr lang="en-US" sz="1000" b="1" kern="0" spc="300" dirty="0">
                 <a:solidFill>
                   <a:srgbClr val="DC822E"/>
                 </a:solidFill>
@@ -2857,7 +2683,7 @@
           <a:bodyPr wrap="square" lIns="0" tIns="0" rIns="0" bIns="0" rtlCol="0" anchor="t"/>
           <a:lstStyle/>
           <a:p>
-            <a:pPr indent="0" marL="0">
+            <a:pPr marL="0" indent="0">
               <a:buNone/>
             </a:pPr>
             <a:r>
@@ -2981,11 +2807,11 @@
           <a:bodyPr wrap="square" rtlCol="0" anchor="ctr"/>
           <a:lstStyle/>
           <a:p>
-            <a:pPr indent="0" marL="0">
-              <a:buNone/>
-            </a:pPr>
-            <a:r>
-              <a:rPr lang="en-US" sz="900" spc="200" kern="0" dirty="0">
+            <a:pPr marL="0" indent="0">
+              <a:buNone/>
+            </a:pPr>
+            <a:r>
+              <a:rPr lang="en-US" sz="900" kern="0" spc="200" dirty="0">
                 <a:solidFill>
                   <a:srgbClr val="7A8A95"/>
                 </a:solidFill>
@@ -3020,7 +2846,7 @@
           <a:bodyPr wrap="square" rtlCol="0" anchor="ctr"/>
           <a:lstStyle/>
           <a:p>
-            <a:pPr algn="r" indent="0" marL="0">
+            <a:pPr marL="0" indent="0" algn="r">
               <a:buNone/>
             </a:pPr>
             <a:r>
@@ -3054,6 +2880,7 @@
         <a:solidFill>
           <a:srgbClr val="12828C"/>
         </a:solidFill>
+        <a:effectLst/>
       </p:bgPr>
     </p:bg>
     <p:spTree>
@@ -3078,7 +2905,7 @@
         </p:nvSpPr>
         <p:spPr>
           <a:xfrm>
-            <a:off x="548640" y="1188720"/>
+            <a:off x="548640" y="469900"/>
             <a:ext cx="8046720" cy="365760"/>
           </a:xfrm>
           <a:prstGeom prst="rect">
@@ -3091,11 +2918,11 @@
           <a:bodyPr wrap="square" rtlCol="0" anchor="ctr"/>
           <a:lstStyle/>
           <a:p>
-            <a:pPr algn="ctr" indent="0" marL="0">
-              <a:buNone/>
-            </a:pPr>
-            <a:r>
-              <a:rPr lang="en-US" sz="1100" b="1" spc="400" kern="0" dirty="0">
+            <a:pPr marL="0" indent="0" algn="ctr">
+              <a:buNone/>
+            </a:pPr>
+            <a:r>
+              <a:rPr lang="en-US" sz="1100" b="1" kern="0" spc="400" dirty="0">
                 <a:solidFill>
                   <a:srgbClr val="DC822E"/>
                 </a:solidFill>
@@ -3117,7 +2944,7 @@
         </p:nvSpPr>
         <p:spPr>
           <a:xfrm>
-            <a:off x="4297680" y="1691640"/>
+            <a:off x="4297680" y="845820"/>
             <a:ext cx="548640" cy="36576"/>
           </a:xfrm>
           <a:prstGeom prst="rect">
@@ -3135,6 +2962,13 @@
             <a:prstDash val="solid"/>
           </a:ln>
         </p:spPr>
+        <p:txBody>
+          <a:bodyPr/>
+          <a:lstStyle/>
+          <a:p>
+            <a:endParaRPr lang="de-CH"/>
+          </a:p>
+        </p:txBody>
       </p:sp>
       <p:sp>
         <p:nvSpPr>
@@ -3144,7 +2978,7 @@
         </p:nvSpPr>
         <p:spPr>
           <a:xfrm>
-            <a:off x="548640" y="2011680"/>
+            <a:off x="548640" y="1675130"/>
             <a:ext cx="8046720" cy="2286000"/>
           </a:xfrm>
           <a:prstGeom prst="rect">
@@ -3157,11 +2991,11 @@
           <a:bodyPr wrap="square" lIns="0" tIns="0" rIns="0" bIns="0" rtlCol="0" anchor="ctr"/>
           <a:lstStyle/>
           <a:p>
-            <a:pPr algn="ctr" indent="0" marL="0">
-              <a:buNone/>
-            </a:pPr>
-            <a:r>
-              <a:rPr lang="en-US" sz="3600" b="1" dirty="0">
+            <a:pPr marL="0" indent="0" algn="ctr">
+              <a:buNone/>
+            </a:pPr>
+            <a:r>
+              <a:rPr lang="en-US" sz="2800" b="1" dirty="0">
                 <a:solidFill>
                   <a:srgbClr val="F1ECDD"/>
                 </a:solidFill>
@@ -3171,14 +3005,14 @@
               </a:rPr>
               <a:t>Die letzte Lektion von Säule 2.</a:t>
             </a:r>
-            <a:endParaRPr lang="en-US" sz="3600" dirty="0"/>
-          </a:p>
-          <a:p>
-            <a:pPr algn="ctr" indent="0" marL="0">
-              <a:buNone/>
-            </a:pPr>
-            <a:r>
-              <a:rPr lang="en-US" sz="3600" b="1" dirty="0">
+            <a:endParaRPr lang="en-US" sz="2800" dirty="0"/>
+          </a:p>
+          <a:p>
+            <a:pPr marL="0" indent="0" algn="ctr">
+              <a:buNone/>
+            </a:pPr>
+            <a:r>
+              <a:rPr lang="en-US" sz="2800" b="1" dirty="0">
                 <a:solidFill>
                   <a:srgbClr val="F1ECDD"/>
                 </a:solidFill>
@@ -3186,16 +3020,10 @@
                 <a:ea typeface="Georgia" pitchFamily="34" charset="-122"/>
                 <a:cs typeface="Georgia" pitchFamily="34" charset="-120"/>
               </a:rPr>
-              <a:t>5 typische Blockaden in den ersten 4 Wochen.</a:t>
-            </a:r>
-            <a:endParaRPr lang="en-US" sz="3600" dirty="0"/>
-          </a:p>
-          <a:p>
-            <a:pPr algn="ctr" indent="0" marL="0">
-              <a:buNone/>
-            </a:pPr>
-            <a:r>
-              <a:rPr lang="en-US" sz="3600" b="1" dirty="0">
+              <a:t>5 typische Blockaden in den </a:t>
+            </a:r>
+            <a:r>
+              <a:rPr lang="en-US" sz="2800" b="1" dirty="0" err="1">
                 <a:solidFill>
                   <a:srgbClr val="F1ECDD"/>
                 </a:solidFill>
@@ -3203,16 +3031,10 @@
                 <a:ea typeface="Georgia" pitchFamily="34" charset="-122"/>
                 <a:cs typeface="Georgia" pitchFamily="34" charset="-120"/>
               </a:rPr>
-              <a:t>Und dein Sonntag-Reset als wiederkehrender Termin im Kalender.</a:t>
-            </a:r>
-            <a:endParaRPr lang="en-US" sz="3600" dirty="0"/>
-          </a:p>
-          <a:p>
-            <a:pPr algn="ctr" indent="0" marL="0">
-              <a:buNone/>
-            </a:pPr>
-            <a:r>
-              <a:rPr lang="en-US" sz="3600" b="1" dirty="0">
+              <a:t>ersten</a:t>
+            </a:r>
+            <a:r>
+              <a:rPr lang="en-US" sz="2800" b="1" dirty="0">
                 <a:solidFill>
                   <a:srgbClr val="F1ECDD"/>
                 </a:solidFill>
@@ -3220,6 +3042,56 @@
                 <a:ea typeface="Georgia" pitchFamily="34" charset="-122"/>
                 <a:cs typeface="Georgia" pitchFamily="34" charset="-120"/>
               </a:rPr>
+              <a:t> </a:t>
+            </a:r>
+          </a:p>
+          <a:p>
+            <a:pPr marL="0" indent="0" algn="ctr">
+              <a:buNone/>
+            </a:pPr>
+            <a:r>
+              <a:rPr lang="en-US" sz="2800" b="1" dirty="0">
+                <a:solidFill>
+                  <a:srgbClr val="F1ECDD"/>
+                </a:solidFill>
+                <a:latin typeface="Georgia" pitchFamily="34" charset="0"/>
+                <a:ea typeface="Georgia" pitchFamily="34" charset="-122"/>
+                <a:cs typeface="Georgia" pitchFamily="34" charset="-120"/>
+              </a:rPr>
+              <a:t>4 Wochen.</a:t>
+            </a:r>
+            <a:endParaRPr lang="en-US" sz="2800" dirty="0"/>
+          </a:p>
+          <a:p>
+            <a:pPr marL="0" indent="0" algn="ctr">
+              <a:buNone/>
+            </a:pPr>
+            <a:r>
+              <a:rPr lang="en-US" sz="2800" b="1" dirty="0">
+                <a:solidFill>
+                  <a:srgbClr val="F1ECDD"/>
+                </a:solidFill>
+                <a:latin typeface="Georgia" pitchFamily="34" charset="0"/>
+                <a:ea typeface="Georgia" pitchFamily="34" charset="-122"/>
+                <a:cs typeface="Georgia" pitchFamily="34" charset="-120"/>
+              </a:rPr>
+              <a:t>Und dein Sonntag-Reset als wiederkehrender Termin im Kalender.</a:t>
+            </a:r>
+            <a:endParaRPr lang="en-US" sz="2800" dirty="0"/>
+          </a:p>
+          <a:p>
+            <a:pPr marL="0" indent="0" algn="ctr">
+              <a:buNone/>
+            </a:pPr>
+            <a:r>
+              <a:rPr lang="en-US" sz="2800" b="1" dirty="0">
+                <a:solidFill>
+                  <a:srgbClr val="F1ECDD"/>
+                </a:solidFill>
+                <a:latin typeface="Georgia" pitchFamily="34" charset="0"/>
+                <a:ea typeface="Georgia" pitchFamily="34" charset="-122"/>
+                <a:cs typeface="Georgia" pitchFamily="34" charset="-120"/>
+              </a:rPr>
               <a:t>Bis dann.</a:t>
             </a:r>
             <a:endParaRPr lang="en-US" sz="3600" dirty="0"/>
@@ -3247,11 +3119,11 @@
           <a:bodyPr wrap="square" rtlCol="0" anchor="ctr"/>
           <a:lstStyle/>
           <a:p>
-            <a:pPr indent="0" marL="0">
-              <a:buNone/>
-            </a:pPr>
-            <a:r>
-              <a:rPr lang="en-US" sz="900" spc="200" kern="0" dirty="0">
+            <a:pPr marL="0" indent="0">
+              <a:buNone/>
+            </a:pPr>
+            <a:r>
+              <a:rPr lang="en-US" sz="900" kern="0" spc="200" dirty="0">
                 <a:solidFill>
                   <a:srgbClr val="F1ECDD"/>
                 </a:solidFill>
@@ -3286,7 +3158,7 @@
           <a:bodyPr wrap="square" rtlCol="0" anchor="ctr"/>
           <a:lstStyle/>
           <a:p>
-            <a:pPr algn="r" indent="0" marL="0">
+            <a:pPr marL="0" indent="0" algn="r">
               <a:buNone/>
             </a:pPr>
             <a:r>
@@ -3320,6 +3192,7 @@
         <a:solidFill>
           <a:srgbClr val="12828C"/>
         </a:solidFill>
+        <a:effectLst/>
       </p:bgPr>
     </p:bg>
     <p:spTree>
@@ -3344,7 +3217,7 @@
         </p:nvSpPr>
         <p:spPr>
           <a:xfrm>
-            <a:off x="548640" y="1188720"/>
+            <a:off x="548640" y="449580"/>
             <a:ext cx="8046720" cy="365760"/>
           </a:xfrm>
           <a:prstGeom prst="rect">
@@ -3357,11 +3230,11 @@
           <a:bodyPr wrap="square" rtlCol="0" anchor="ctr"/>
           <a:lstStyle/>
           <a:p>
-            <a:pPr algn="ctr" indent="0" marL="0">
-              <a:buNone/>
-            </a:pPr>
-            <a:r>
-              <a:rPr lang="en-US" sz="1100" b="1" spc="400" kern="0" dirty="0">
+            <a:pPr marL="0" indent="0" algn="ctr">
+              <a:buNone/>
+            </a:pPr>
+            <a:r>
+              <a:rPr lang="en-US" sz="1100" b="1" kern="0" spc="400" dirty="0">
                 <a:solidFill>
                   <a:srgbClr val="DC822E"/>
                 </a:solidFill>
@@ -3383,7 +3256,7 @@
         </p:nvSpPr>
         <p:spPr>
           <a:xfrm>
-            <a:off x="4297680" y="1691640"/>
+            <a:off x="4297680" y="809244"/>
             <a:ext cx="548640" cy="36576"/>
           </a:xfrm>
           <a:prstGeom prst="rect">
@@ -3401,6 +3274,13 @@
             <a:prstDash val="solid"/>
           </a:ln>
         </p:spPr>
+        <p:txBody>
+          <a:bodyPr/>
+          <a:lstStyle/>
+          <a:p>
+            <a:endParaRPr lang="de-CH"/>
+          </a:p>
+        </p:txBody>
       </p:sp>
       <p:sp>
         <p:nvSpPr>
@@ -3410,7 +3290,7 @@
         </p:nvSpPr>
         <p:spPr>
           <a:xfrm>
-            <a:off x="548640" y="2011680"/>
+            <a:off x="548640" y="1680210"/>
             <a:ext cx="8046720" cy="2286000"/>
           </a:xfrm>
           <a:prstGeom prst="rect">
@@ -3423,11 +3303,11 @@
           <a:bodyPr wrap="square" lIns="0" tIns="0" rIns="0" bIns="0" rtlCol="0" anchor="ctr"/>
           <a:lstStyle/>
           <a:p>
-            <a:pPr algn="ctr" indent="0" marL="0">
-              <a:buNone/>
-            </a:pPr>
-            <a:r>
-              <a:rPr lang="en-US" sz="3600" b="1" dirty="0">
+            <a:pPr marL="0" indent="0" algn="ctr">
+              <a:buNone/>
+            </a:pPr>
+            <a:r>
+              <a:rPr lang="en-US" sz="3200" b="1" dirty="0">
                 <a:solidFill>
                   <a:srgbClr val="F1ECDD"/>
                 </a:solidFill>
@@ -3437,14 +3317,14 @@
               </a:rPr>
               <a:t>Unstrukturierter Haushalt frisst 2 Stunden pro Tag.</a:t>
             </a:r>
-            <a:endParaRPr lang="en-US" sz="3600" dirty="0"/>
-          </a:p>
-          <a:p>
-            <a:pPr algn="ctr" indent="0" marL="0">
-              <a:buNone/>
-            </a:pPr>
-            <a:r>
-              <a:rPr lang="en-US" sz="3600" b="1" dirty="0">
+            <a:endParaRPr lang="en-US" sz="3200" dirty="0"/>
+          </a:p>
+          <a:p>
+            <a:pPr marL="0" indent="0" algn="ctr">
+              <a:buNone/>
+            </a:pPr>
+            <a:r>
+              <a:rPr lang="en-US" sz="3200" b="1" dirty="0">
                 <a:solidFill>
                   <a:srgbClr val="F1ECDD"/>
                 </a:solidFill>
@@ -3454,14 +3334,14 @@
               </a:rPr>
               <a:t>Strukturierter Haushalt: 30–45 Min.</a:t>
             </a:r>
-            <a:endParaRPr lang="en-US" sz="3600" dirty="0"/>
-          </a:p>
-          <a:p>
-            <a:pPr algn="ctr" indent="0" marL="0">
-              <a:buNone/>
-            </a:pPr>
-            <a:r>
-              <a:rPr lang="en-US" sz="3600" b="1" dirty="0">
+            <a:endParaRPr lang="en-US" sz="3200" dirty="0"/>
+          </a:p>
+          <a:p>
+            <a:pPr marL="0" indent="0" algn="ctr">
+              <a:buNone/>
+            </a:pPr>
+            <a:r>
+              <a:rPr lang="en-US" sz="3200" b="1" dirty="0">
                 <a:solidFill>
                   <a:srgbClr val="F1ECDD"/>
                 </a:solidFill>
@@ -3471,14 +3351,14 @@
               </a:rPr>
               <a:t>Das sind 1.5 Stunden zurück — täglich.</a:t>
             </a:r>
-            <a:endParaRPr lang="en-US" sz="3600" dirty="0"/>
-          </a:p>
-          <a:p>
-            <a:pPr algn="ctr" indent="0" marL="0">
-              <a:buNone/>
-            </a:pPr>
-            <a:r>
-              <a:rPr lang="en-US" sz="3600" b="1" dirty="0">
+            <a:endParaRPr lang="en-US" sz="3200" dirty="0"/>
+          </a:p>
+          <a:p>
+            <a:pPr marL="0" indent="0" algn="ctr">
+              <a:buNone/>
+            </a:pPr>
+            <a:r>
+              <a:rPr lang="en-US" sz="3200" b="1" dirty="0">
                 <a:solidFill>
                   <a:srgbClr val="F1ECDD"/>
                 </a:solidFill>
@@ -3488,7 +3368,7 @@
               </a:rPr>
               <a:t>10 Stunden Business-Zeit zusätzlich pro Woche.</a:t>
             </a:r>
-            <a:endParaRPr lang="en-US" sz="3600" dirty="0"/>
+            <a:endParaRPr lang="en-US" sz="3200" dirty="0"/>
           </a:p>
         </p:txBody>
       </p:sp>
@@ -3513,11 +3393,11 @@
           <a:bodyPr wrap="square" rtlCol="0" anchor="ctr"/>
           <a:lstStyle/>
           <a:p>
-            <a:pPr indent="0" marL="0">
-              <a:buNone/>
-            </a:pPr>
-            <a:r>
-              <a:rPr lang="en-US" sz="900" spc="200" kern="0" dirty="0">
+            <a:pPr marL="0" indent="0">
+              <a:buNone/>
+            </a:pPr>
+            <a:r>
+              <a:rPr lang="en-US" sz="900" kern="0" spc="200" dirty="0">
                 <a:solidFill>
                   <a:srgbClr val="F1ECDD"/>
                 </a:solidFill>
@@ -3552,7 +3432,7 @@
           <a:bodyPr wrap="square" rtlCol="0" anchor="ctr"/>
           <a:lstStyle/>
           <a:p>
-            <a:pPr algn="r" indent="0" marL="0">
+            <a:pPr marL="0" indent="0" algn="r">
               <a:buNone/>
             </a:pPr>
             <a:r>
@@ -3586,6 +3466,7 @@
         <a:solidFill>
           <a:srgbClr val="FFFFFF"/>
         </a:solidFill>
+        <a:effectLst/>
       </p:bgPr>
     </p:bg>
     <p:spTree>
@@ -3623,7 +3504,7 @@
           <a:bodyPr wrap="square" lIns="0" tIns="0" rIns="0" bIns="0" rtlCol="0" anchor="t"/>
           <a:lstStyle/>
           <a:p>
-            <a:pPr indent="0" marL="0">
+            <a:pPr marL="0" indent="0">
               <a:buNone/>
             </a:pPr>
             <a:r>
@@ -3667,6 +3548,13 @@
             <a:prstDash val="solid"/>
           </a:ln>
         </p:spPr>
+        <p:txBody>
+          <a:bodyPr/>
+          <a:lstStyle/>
+          <a:p>
+            <a:endParaRPr lang="de-CH"/>
+          </a:p>
+        </p:txBody>
       </p:sp>
       <p:sp>
         <p:nvSpPr>
@@ -3694,6 +3582,13 @@
             <a:prstDash val="solid"/>
           </a:ln>
         </p:spPr>
+        <p:txBody>
+          <a:bodyPr/>
+          <a:lstStyle/>
+          <a:p>
+            <a:endParaRPr lang="de-CH"/>
+          </a:p>
+        </p:txBody>
       </p:sp>
       <p:sp>
         <p:nvSpPr>
@@ -3716,11 +3611,11 @@
           <a:bodyPr wrap="square" lIns="0" tIns="0" rIns="0" bIns="0" rtlCol="0" anchor="t"/>
           <a:lstStyle/>
           <a:p>
-            <a:pPr indent="0" marL="0">
-              <a:buNone/>
-            </a:pPr>
-            <a:r>
-              <a:rPr lang="en-US" sz="2200" b="1" dirty="0">
+            <a:pPr marL="0" indent="0">
+              <a:buNone/>
+            </a:pPr>
+            <a:r>
+              <a:rPr lang="en-US" sz="1600" b="1" dirty="0">
                 <a:solidFill>
                   <a:srgbClr val="1A3A4A"/>
                 </a:solidFill>
@@ -3730,14 +3625,12 @@
               </a:rPr>
               <a:t>TYP A</a:t>
             </a:r>
-            <a:endParaRPr lang="en-US" sz="2200" dirty="0"/>
-          </a:p>
-          <a:p>
-            <a:pPr indent="0" marL="0">
-              <a:buNone/>
-            </a:pPr>
-            <a:r>
-              <a:rPr lang="en-US" sz="2200" b="1" dirty="0">
+            <a:r>
+              <a:rPr lang="en-US" sz="1600" dirty="0"/>
+              <a:t> </a:t>
+            </a:r>
+            <a:r>
+              <a:rPr lang="en-US" sz="1600" b="1" dirty="0">
                 <a:solidFill>
                   <a:srgbClr val="1A3A4A"/>
                 </a:solidFill>
@@ -3747,14 +3640,14 @@
               </a:rPr>
               <a:t>Analog &amp;</a:t>
             </a:r>
-            <a:endParaRPr lang="en-US" sz="2200" dirty="0"/>
-          </a:p>
-          <a:p>
-            <a:pPr indent="0" marL="0">
-              <a:buNone/>
-            </a:pPr>
-            <a:r>
-              <a:rPr lang="en-US" sz="2200" b="1" dirty="0">
+            <a:endParaRPr lang="en-US" sz="1600" dirty="0"/>
+          </a:p>
+          <a:p>
+            <a:pPr marL="0" indent="0">
+              <a:buNone/>
+            </a:pPr>
+            <a:r>
+              <a:rPr lang="en-US" sz="1600" b="1" dirty="0">
                 <a:solidFill>
                   <a:srgbClr val="1A3A4A"/>
                 </a:solidFill>
@@ -3764,7 +3657,7 @@
               </a:rPr>
               <a:t>achtsam</a:t>
             </a:r>
-            <a:endParaRPr lang="en-US" sz="2200" dirty="0"/>
+            <a:endParaRPr lang="en-US" sz="1600" dirty="0"/>
           </a:p>
         </p:txBody>
       </p:sp>
@@ -3789,7 +3682,7 @@
           <a:bodyPr wrap="square" lIns="0" tIns="0" rIns="0" bIns="0" rtlCol="0" anchor="t"/>
           <a:lstStyle/>
           <a:p>
-            <a:pPr indent="0" marL="0">
+            <a:pPr marL="0" indent="0">
               <a:buNone/>
             </a:pPr>
             <a:r>
@@ -3806,7 +3699,7 @@
             <a:endParaRPr lang="en-US" sz="1500" dirty="0"/>
           </a:p>
           <a:p>
-            <a:pPr indent="0" marL="0">
+            <a:pPr marL="0" indent="0">
               <a:buNone/>
             </a:pPr>
             <a:r>
@@ -3823,7 +3716,7 @@
             <a:endParaRPr lang="en-US" sz="1500" dirty="0"/>
           </a:p>
           <a:p>
-            <a:pPr indent="0" marL="0">
+            <a:pPr marL="0" indent="0">
               <a:buNone/>
             </a:pPr>
             <a:r>
@@ -3867,6 +3760,13 @@
             <a:prstDash val="solid"/>
           </a:ln>
         </p:spPr>
+        <p:txBody>
+          <a:bodyPr/>
+          <a:lstStyle/>
+          <a:p>
+            <a:endParaRPr lang="de-CH"/>
+          </a:p>
+        </p:txBody>
       </p:sp>
       <p:sp>
         <p:nvSpPr>
@@ -3894,6 +3794,13 @@
             <a:prstDash val="solid"/>
           </a:ln>
         </p:spPr>
+        <p:txBody>
+          <a:bodyPr/>
+          <a:lstStyle/>
+          <a:p>
+            <a:endParaRPr lang="de-CH"/>
+          </a:p>
+        </p:txBody>
       </p:sp>
       <p:sp>
         <p:nvSpPr>
@@ -3916,11 +3823,11 @@
           <a:bodyPr wrap="square" lIns="0" tIns="0" rIns="0" bIns="0" rtlCol="0" anchor="t"/>
           <a:lstStyle/>
           <a:p>
-            <a:pPr indent="0" marL="0">
-              <a:buNone/>
-            </a:pPr>
-            <a:r>
-              <a:rPr lang="en-US" sz="2200" b="1" dirty="0">
+            <a:pPr marL="0" indent="0">
+              <a:buNone/>
+            </a:pPr>
+            <a:r>
+              <a:rPr lang="en-US" sz="1600" b="1" dirty="0">
                 <a:solidFill>
                   <a:srgbClr val="1A3A4A"/>
                 </a:solidFill>
@@ -3930,14 +3837,12 @@
               </a:rPr>
               <a:t>TYP B</a:t>
             </a:r>
-            <a:endParaRPr lang="en-US" sz="2200" dirty="0"/>
-          </a:p>
-          <a:p>
-            <a:pPr indent="0" marL="0">
-              <a:buNone/>
-            </a:pPr>
-            <a:r>
-              <a:rPr lang="en-US" sz="2200" b="1" dirty="0">
+            <a:r>
+              <a:rPr lang="en-US" sz="1600" dirty="0"/>
+              <a:t> </a:t>
+            </a:r>
+            <a:r>
+              <a:rPr lang="en-US" sz="1600" b="1" dirty="0">
                 <a:solidFill>
                   <a:srgbClr val="1A3A4A"/>
                 </a:solidFill>
@@ -3947,14 +3852,14 @@
               </a:rPr>
               <a:t>Digital &amp;</a:t>
             </a:r>
-            <a:endParaRPr lang="en-US" sz="2200" dirty="0"/>
-          </a:p>
-          <a:p>
-            <a:pPr indent="0" marL="0">
-              <a:buNone/>
-            </a:pPr>
-            <a:r>
-              <a:rPr lang="en-US" sz="2200" b="1" dirty="0">
+            <a:endParaRPr lang="en-US" sz="1600" dirty="0"/>
+          </a:p>
+          <a:p>
+            <a:pPr marL="0" indent="0">
+              <a:buNone/>
+            </a:pPr>
+            <a:r>
+              <a:rPr lang="en-US" sz="1600" b="1" dirty="0">
                 <a:solidFill>
                   <a:srgbClr val="1A3A4A"/>
                 </a:solidFill>
@@ -3964,7 +3869,7 @@
               </a:rPr>
               <a:t>pragmatisch</a:t>
             </a:r>
-            <a:endParaRPr lang="en-US" sz="2200" dirty="0"/>
+            <a:endParaRPr lang="en-US" sz="1600" dirty="0"/>
           </a:p>
         </p:txBody>
       </p:sp>
@@ -3989,7 +3894,7 @@
           <a:bodyPr wrap="square" lIns="0" tIns="0" rIns="0" bIns="0" rtlCol="0" anchor="t"/>
           <a:lstStyle/>
           <a:p>
-            <a:pPr indent="0" marL="0">
+            <a:pPr marL="0" indent="0">
               <a:buNone/>
             </a:pPr>
             <a:r>
@@ -4006,7 +3911,7 @@
             <a:endParaRPr lang="en-US" sz="1500" dirty="0"/>
           </a:p>
           <a:p>
-            <a:pPr indent="0" marL="0">
+            <a:pPr marL="0" indent="0">
               <a:buNone/>
             </a:pPr>
             <a:r>
@@ -4023,7 +3928,7 @@
             <a:endParaRPr lang="en-US" sz="1500" dirty="0"/>
           </a:p>
           <a:p>
-            <a:pPr indent="0" marL="0">
+            <a:pPr marL="0" indent="0">
               <a:buNone/>
             </a:pPr>
             <a:r>
@@ -4067,6 +3972,13 @@
             <a:prstDash val="solid"/>
           </a:ln>
         </p:spPr>
+        <p:txBody>
+          <a:bodyPr/>
+          <a:lstStyle/>
+          <a:p>
+            <a:endParaRPr lang="de-CH"/>
+          </a:p>
+        </p:txBody>
       </p:sp>
       <p:sp>
         <p:nvSpPr>
@@ -4094,6 +4006,13 @@
             <a:prstDash val="solid"/>
           </a:ln>
         </p:spPr>
+        <p:txBody>
+          <a:bodyPr/>
+          <a:lstStyle/>
+          <a:p>
+            <a:endParaRPr lang="de-CH"/>
+          </a:p>
+        </p:txBody>
       </p:sp>
       <p:sp>
         <p:nvSpPr>
@@ -4116,11 +4035,11 @@
           <a:bodyPr wrap="square" lIns="0" tIns="0" rIns="0" bIns="0" rtlCol="0" anchor="t"/>
           <a:lstStyle/>
           <a:p>
-            <a:pPr indent="0" marL="0">
-              <a:buNone/>
-            </a:pPr>
-            <a:r>
-              <a:rPr lang="en-US" sz="2200" b="1" dirty="0">
+            <a:pPr marL="0" indent="0">
+              <a:buNone/>
+            </a:pPr>
+            <a:r>
+              <a:rPr lang="en-US" sz="1600" b="1" dirty="0">
                 <a:solidFill>
                   <a:srgbClr val="1A3A4A"/>
                 </a:solidFill>
@@ -4130,14 +4049,14 @@
               </a:rPr>
               <a:t>TYP C</a:t>
             </a:r>
-            <a:endParaRPr lang="en-US" sz="2200" dirty="0"/>
-          </a:p>
-          <a:p>
-            <a:pPr indent="0" marL="0">
-              <a:buNone/>
-            </a:pPr>
-            <a:r>
-              <a:rPr lang="en-US" sz="2200" b="1" dirty="0">
+            <a:endParaRPr lang="en-US" sz="1600" dirty="0"/>
+          </a:p>
+          <a:p>
+            <a:pPr marL="0" indent="0">
+              <a:buNone/>
+            </a:pPr>
+            <a:r>
+              <a:rPr lang="en-US" sz="1600" b="1" dirty="0" err="1">
                 <a:solidFill>
                   <a:srgbClr val="1A3A4A"/>
                 </a:solidFill>
@@ -4145,16 +4064,10 @@
                 <a:ea typeface="Georgia" pitchFamily="34" charset="-122"/>
                 <a:cs typeface="Georgia" pitchFamily="34" charset="-120"/>
               </a:rPr>
-              <a:t>Struktur-</a:t>
-            </a:r>
-            <a:endParaRPr lang="en-US" sz="2200" dirty="0"/>
-          </a:p>
-          <a:p>
-            <a:pPr indent="0" marL="0">
-              <a:buNone/>
-            </a:pPr>
-            <a:r>
-              <a:rPr lang="en-US" sz="2200" b="1" dirty="0">
+              <a:t>Struktur</a:t>
+            </a:r>
+            <a:r>
+              <a:rPr lang="en-US" sz="1600" b="1" dirty="0">
                 <a:solidFill>
                   <a:srgbClr val="1A3A4A"/>
                 </a:solidFill>
@@ -4162,9 +4075,9 @@
                 <a:ea typeface="Georgia" pitchFamily="34" charset="-122"/>
                 <a:cs typeface="Georgia" pitchFamily="34" charset="-120"/>
               </a:rPr>
-              <a:t>Lover</a:t>
-            </a:r>
-            <a:endParaRPr lang="en-US" sz="2200" dirty="0"/>
+              <a:t>-Lover</a:t>
+            </a:r>
+            <a:endParaRPr lang="en-US" sz="1600" dirty="0"/>
           </a:p>
         </p:txBody>
       </p:sp>
@@ -4189,7 +4102,7 @@
           <a:bodyPr wrap="square" lIns="0" tIns="0" rIns="0" bIns="0" rtlCol="0" anchor="t"/>
           <a:lstStyle/>
           <a:p>
-            <a:pPr indent="0" marL="0">
+            <a:pPr marL="0" indent="0">
               <a:buNone/>
             </a:pPr>
             <a:r>
@@ -4206,7 +4119,7 @@
             <a:endParaRPr lang="en-US" sz="1500" dirty="0"/>
           </a:p>
           <a:p>
-            <a:pPr indent="0" marL="0">
+            <a:pPr marL="0" indent="0">
               <a:buNone/>
             </a:pPr>
             <a:r>
@@ -4223,7 +4136,7 @@
             <a:endParaRPr lang="en-US" sz="1500" dirty="0"/>
           </a:p>
           <a:p>
-            <a:pPr indent="0" marL="0">
+            <a:pPr marL="0" indent="0">
               <a:buNone/>
             </a:pPr>
             <a:r>
@@ -4262,11 +4175,11 @@
           <a:bodyPr wrap="square" rtlCol="0" anchor="ctr"/>
           <a:lstStyle/>
           <a:p>
-            <a:pPr indent="0" marL="0">
-              <a:buNone/>
-            </a:pPr>
-            <a:r>
-              <a:rPr lang="en-US" sz="900" spc="200" kern="0" dirty="0">
+            <a:pPr marL="0" indent="0">
+              <a:buNone/>
+            </a:pPr>
+            <a:r>
+              <a:rPr lang="en-US" sz="900" kern="0" spc="200" dirty="0">
                 <a:solidFill>
                   <a:srgbClr val="7A8A95"/>
                 </a:solidFill>
@@ -4301,7 +4214,7 @@
           <a:bodyPr wrap="square" rtlCol="0" anchor="ctr"/>
           <a:lstStyle/>
           <a:p>
-            <a:pPr algn="r" indent="0" marL="0">
+            <a:pPr marL="0" indent="0" algn="r">
               <a:buNone/>
             </a:pPr>
             <a:r>
@@ -4335,6 +4248,7 @@
         <a:solidFill>
           <a:srgbClr val="12828C"/>
         </a:solidFill>
+        <a:effectLst/>
       </p:bgPr>
     </p:bg>
     <p:spTree>
@@ -4359,7 +4273,7 @@
         </p:nvSpPr>
         <p:spPr>
           <a:xfrm>
-            <a:off x="548640" y="1188720"/>
+            <a:off x="548640" y="321733"/>
             <a:ext cx="8046720" cy="365760"/>
           </a:xfrm>
           <a:prstGeom prst="rect">
@@ -4372,11 +4286,11 @@
           <a:bodyPr wrap="square" rtlCol="0" anchor="ctr"/>
           <a:lstStyle/>
           <a:p>
-            <a:pPr algn="ctr" indent="0" marL="0">
-              <a:buNone/>
-            </a:pPr>
-            <a:r>
-              <a:rPr lang="en-US" sz="1100" b="1" spc="400" kern="0" dirty="0">
+            <a:pPr marL="0" indent="0" algn="ctr">
+              <a:buNone/>
+            </a:pPr>
+            <a:r>
+              <a:rPr lang="en-US" sz="1100" b="1" kern="0" spc="400" dirty="0">
                 <a:solidFill>
                   <a:srgbClr val="DC822E"/>
                 </a:solidFill>
@@ -4398,7 +4312,7 @@
         </p:nvSpPr>
         <p:spPr>
           <a:xfrm>
-            <a:off x="4297680" y="1691640"/>
+            <a:off x="4297680" y="800777"/>
             <a:ext cx="548640" cy="36576"/>
           </a:xfrm>
           <a:prstGeom prst="rect">
@@ -4416,6 +4330,13 @@
             <a:prstDash val="solid"/>
           </a:ln>
         </p:spPr>
+        <p:txBody>
+          <a:bodyPr/>
+          <a:lstStyle/>
+          <a:p>
+            <a:endParaRPr lang="de-CH"/>
+          </a:p>
+        </p:txBody>
       </p:sp>
       <p:sp>
         <p:nvSpPr>
@@ -4438,11 +4359,11 @@
           <a:bodyPr wrap="square" lIns="0" tIns="0" rIns="0" bIns="0" rtlCol="0" anchor="ctr"/>
           <a:lstStyle/>
           <a:p>
-            <a:pPr algn="ctr" indent="0" marL="0">
-              <a:buNone/>
-            </a:pPr>
-            <a:r>
-              <a:rPr lang="en-US" sz="3600" b="1" dirty="0">
+            <a:pPr marL="0" indent="0" algn="ctr">
+              <a:buNone/>
+            </a:pPr>
+            <a:r>
+              <a:rPr lang="en-US" sz="2800" b="1" dirty="0">
                 <a:solidFill>
                   <a:srgbClr val="F1ECDD"/>
                 </a:solidFill>
@@ -4452,14 +4373,14 @@
               </a:rPr>
               <a:t>7 Fragen aus meinem Familienorga-for-real-Kurs.</a:t>
             </a:r>
-            <a:endParaRPr lang="en-US" sz="3600" dirty="0"/>
-          </a:p>
-          <a:p>
-            <a:pPr algn="ctr" indent="0" marL="0">
-              <a:buNone/>
-            </a:pPr>
-            <a:r>
-              <a:rPr lang="en-US" sz="3600" b="1" dirty="0">
+            <a:endParaRPr lang="en-US" sz="2800" dirty="0"/>
+          </a:p>
+          <a:p>
+            <a:pPr marL="0" indent="0" algn="ctr">
+              <a:buNone/>
+            </a:pPr>
+            <a:r>
+              <a:rPr lang="en-US" sz="2800" b="1" dirty="0">
                 <a:solidFill>
                   <a:srgbClr val="F1ECDD"/>
                 </a:solidFill>
@@ -4469,14 +4390,14 @@
               </a:rPr>
               <a:t>Antworte aus dem Bauch raus — 30 Sek pro Frage.</a:t>
             </a:r>
-            <a:endParaRPr lang="en-US" sz="3600" dirty="0"/>
-          </a:p>
-          <a:p>
-            <a:pPr algn="ctr" indent="0" marL="0">
-              <a:buNone/>
-            </a:pPr>
-            <a:r>
-              <a:rPr lang="en-US" sz="3600" b="1" dirty="0">
+            <a:endParaRPr lang="en-US" sz="2800" dirty="0"/>
+          </a:p>
+          <a:p>
+            <a:pPr marL="0" indent="0" algn="ctr">
+              <a:buNone/>
+            </a:pPr>
+            <a:r>
+              <a:rPr lang="en-US" sz="2800" b="1" dirty="0">
                 <a:solidFill>
                   <a:srgbClr val="F1ECDD"/>
                 </a:solidFill>
@@ -4486,7 +4407,7 @@
               </a:rPr>
               <a:t>Am Ende zählst du wieviel A, wieviel B, wieviel C.</a:t>
             </a:r>
-            <a:endParaRPr lang="en-US" sz="3600" dirty="0"/>
+            <a:endParaRPr lang="en-US" sz="2800" dirty="0"/>
           </a:p>
         </p:txBody>
       </p:sp>
@@ -4511,11 +4432,11 @@
           <a:bodyPr wrap="square" rtlCol="0" anchor="ctr"/>
           <a:lstStyle/>
           <a:p>
-            <a:pPr indent="0" marL="0">
-              <a:buNone/>
-            </a:pPr>
-            <a:r>
-              <a:rPr lang="en-US" sz="900" spc="200" kern="0" dirty="0">
+            <a:pPr marL="0" indent="0">
+              <a:buNone/>
+            </a:pPr>
+            <a:r>
+              <a:rPr lang="en-US" sz="900" kern="0" spc="200" dirty="0">
                 <a:solidFill>
                   <a:srgbClr val="F1ECDD"/>
                 </a:solidFill>
@@ -4550,7 +4471,7 @@
           <a:bodyPr wrap="square" rtlCol="0" anchor="ctr"/>
           <a:lstStyle/>
           <a:p>
-            <a:pPr algn="r" indent="0" marL="0">
+            <a:pPr marL="0" indent="0" algn="r">
               <a:buNone/>
             </a:pPr>
             <a:r>
@@ -4584,6 +4505,7 @@
         <a:solidFill>
           <a:srgbClr val="FFFFFF"/>
         </a:solidFill>
+        <a:effectLst/>
       </p:bgPr>
     </p:bg>
     <p:spTree>
@@ -4621,11 +4543,11 @@
           <a:bodyPr wrap="square" rtlCol="0" anchor="ctr"/>
           <a:lstStyle/>
           <a:p>
-            <a:pPr indent="0" marL="0">
-              <a:buNone/>
-            </a:pPr>
-            <a:r>
-              <a:rPr lang="en-US" sz="1000" b="1" spc="400" kern="0" dirty="0">
+            <a:pPr marL="0" indent="0">
+              <a:buNone/>
+            </a:pPr>
+            <a:r>
+              <a:rPr lang="en-US" sz="1000" b="1" kern="0" spc="400" dirty="0">
                 <a:solidFill>
                   <a:srgbClr val="DC822E"/>
                 </a:solidFill>
@@ -4660,7 +4582,7 @@
           <a:bodyPr wrap="square" lIns="0" tIns="0" rIns="0" bIns="0" rtlCol="0" anchor="t"/>
           <a:lstStyle/>
           <a:p>
-            <a:pPr indent="0" marL="0">
+            <a:pPr marL="0" indent="0">
               <a:buNone/>
             </a:pPr>
             <a:r>
@@ -4831,6 +4753,13 @@
             <a:prstDash val="solid"/>
           </a:ln>
         </p:spPr>
+        <p:txBody>
+          <a:bodyPr/>
+          <a:lstStyle/>
+          <a:p>
+            <a:endParaRPr lang="de-CH"/>
+          </a:p>
+        </p:txBody>
       </p:sp>
       <p:sp>
         <p:nvSpPr>
@@ -4858,6 +4787,13 @@
             <a:prstDash val="solid"/>
           </a:ln>
         </p:spPr>
+        <p:txBody>
+          <a:bodyPr/>
+          <a:lstStyle/>
+          <a:p>
+            <a:endParaRPr lang="de-CH"/>
+          </a:p>
+        </p:txBody>
       </p:sp>
       <p:sp>
         <p:nvSpPr>
@@ -4880,11 +4816,11 @@
           <a:bodyPr wrap="square" rtlCol="0" anchor="ctr"/>
           <a:lstStyle/>
           <a:p>
-            <a:pPr indent="0" marL="0">
-              <a:buNone/>
-            </a:pPr>
-            <a:r>
-              <a:rPr lang="en-US" sz="900" b="1" spc="400" kern="0" dirty="0">
+            <a:pPr marL="0" indent="0">
+              <a:buNone/>
+            </a:pPr>
+            <a:r>
+              <a:rPr lang="en-US" sz="900" b="1" kern="0" spc="400" dirty="0">
                 <a:solidFill>
                   <a:srgbClr val="DC822E"/>
                 </a:solidFill>
@@ -4919,7 +4855,7 @@
           <a:bodyPr wrap="square" lIns="0" tIns="0" rIns="0" bIns="0" rtlCol="0" anchor="t"/>
           <a:lstStyle/>
           <a:p>
-            <a:pPr indent="0" marL="0">
+            <a:pPr marL="0" indent="0">
               <a:buNone/>
             </a:pPr>
             <a:r>
@@ -4958,11 +4894,11 @@
           <a:bodyPr wrap="square" rtlCol="0" anchor="ctr"/>
           <a:lstStyle/>
           <a:p>
-            <a:pPr indent="0" marL="0">
-              <a:buNone/>
-            </a:pPr>
-            <a:r>
-              <a:rPr lang="en-US" sz="900" spc="200" kern="0" dirty="0">
+            <a:pPr marL="0" indent="0">
+              <a:buNone/>
+            </a:pPr>
+            <a:r>
+              <a:rPr lang="en-US" sz="900" kern="0" spc="200" dirty="0">
                 <a:solidFill>
                   <a:srgbClr val="7A8A95"/>
                 </a:solidFill>
@@ -4997,7 +4933,7 @@
           <a:bodyPr wrap="square" rtlCol="0" anchor="ctr"/>
           <a:lstStyle/>
           <a:p>
-            <a:pPr algn="r" indent="0" marL="0">
+            <a:pPr marL="0" indent="0" algn="r">
               <a:buNone/>
             </a:pPr>
             <a:r>
@@ -5031,6 +4967,7 @@
         <a:solidFill>
           <a:srgbClr val="FFFFFF"/>
         </a:solidFill>
+        <a:effectLst/>
       </p:bgPr>
     </p:bg>
     <p:spTree>
@@ -5068,7 +5005,7 @@
           <a:bodyPr wrap="square" lIns="0" tIns="0" rIns="0" bIns="0" rtlCol="0" anchor="t"/>
           <a:lstStyle/>
           <a:p>
-            <a:pPr indent="0" marL="0">
+            <a:pPr marL="0" indent="0">
               <a:buNone/>
             </a:pPr>
             <a:r>
@@ -5112,6 +5049,13 @@
             <a:prstDash val="solid"/>
           </a:ln>
         </p:spPr>
+        <p:txBody>
+          <a:bodyPr/>
+          <a:lstStyle/>
+          <a:p>
+            <a:endParaRPr lang="de-CH"/>
+          </a:p>
+        </p:txBody>
       </p:sp>
       <p:sp>
         <p:nvSpPr>
@@ -5134,7 +5078,7 @@
           <a:bodyPr wrap="square" lIns="0" tIns="0" rIns="0" bIns="0" rtlCol="0" anchor="ctr"/>
           <a:lstStyle/>
           <a:p>
-            <a:pPr algn="ctr" indent="0" marL="0">
+            <a:pPr marL="0" indent="0" algn="ctr">
               <a:buNone/>
             </a:pPr>
             <a:r>
@@ -5178,6 +5122,13 @@
             <a:prstDash val="solid"/>
           </a:ln>
         </p:spPr>
+        <p:txBody>
+          <a:bodyPr/>
+          <a:lstStyle/>
+          <a:p>
+            <a:endParaRPr lang="de-CH"/>
+          </a:p>
+        </p:txBody>
       </p:sp>
       <p:sp>
         <p:nvSpPr>
@@ -5200,7 +5151,7 @@
           <a:bodyPr wrap="square" lIns="0" tIns="0" rIns="0" bIns="0" rtlCol="0" anchor="t"/>
           <a:lstStyle/>
           <a:p>
-            <a:pPr indent="0" marL="0">
+            <a:pPr marL="0" indent="0">
               <a:buNone/>
             </a:pPr>
             <a:r>
@@ -5239,7 +5190,7 @@
           <a:bodyPr wrap="square" lIns="0" tIns="0" rIns="0" bIns="0" rtlCol="0" anchor="t"/>
           <a:lstStyle/>
           <a:p>
-            <a:pPr indent="0" marL="0">
+            <a:pPr marL="0" indent="0">
               <a:buNone/>
             </a:pPr>
             <a:r>
@@ -5256,13 +5207,13 @@
             <a:endParaRPr lang="en-US" sz="1400" dirty="0"/>
           </a:p>
           <a:p>
-            <a:pPr indent="0" marL="0">
+            <a:pPr marL="0" indent="0">
               <a:buNone/>
             </a:pPr>
             <a:endParaRPr lang="en-US" sz="1400" dirty="0"/>
           </a:p>
           <a:p>
-            <a:pPr indent="0" marL="0">
+            <a:pPr marL="0" indent="0">
               <a:buNone/>
             </a:pPr>
             <a:r>
@@ -5306,6 +5257,13 @@
             <a:prstDash val="solid"/>
           </a:ln>
         </p:spPr>
+        <p:txBody>
+          <a:bodyPr/>
+          <a:lstStyle/>
+          <a:p>
+            <a:endParaRPr lang="de-CH"/>
+          </a:p>
+        </p:txBody>
       </p:sp>
       <p:sp>
         <p:nvSpPr>
@@ -5328,7 +5286,7 @@
           <a:bodyPr wrap="square" lIns="0" tIns="0" rIns="0" bIns="0" rtlCol="0" anchor="ctr"/>
           <a:lstStyle/>
           <a:p>
-            <a:pPr algn="ctr" indent="0" marL="0">
+            <a:pPr marL="0" indent="0" algn="ctr">
               <a:buNone/>
             </a:pPr>
             <a:r>
@@ -5372,6 +5330,13 @@
             <a:prstDash val="solid"/>
           </a:ln>
         </p:spPr>
+        <p:txBody>
+          <a:bodyPr/>
+          <a:lstStyle/>
+          <a:p>
+            <a:endParaRPr lang="de-CH"/>
+          </a:p>
+        </p:txBody>
       </p:sp>
       <p:sp>
         <p:nvSpPr>
@@ -5394,7 +5359,7 @@
           <a:bodyPr wrap="square" lIns="0" tIns="0" rIns="0" bIns="0" rtlCol="0" anchor="t"/>
           <a:lstStyle/>
           <a:p>
-            <a:pPr indent="0" marL="0">
+            <a:pPr marL="0" indent="0">
               <a:buNone/>
             </a:pPr>
             <a:r>
@@ -5420,8 +5385,8 @@
         </p:nvSpPr>
         <p:spPr>
           <a:xfrm>
-            <a:off x="3566160" y="3246120"/>
-            <a:ext cx="2148840" cy="1188720"/>
+            <a:off x="3566159" y="3246120"/>
+            <a:ext cx="2272453" cy="1188720"/>
           </a:xfrm>
           <a:prstGeom prst="rect">
             <a:avLst/>
@@ -5433,7 +5398,7 @@
           <a:bodyPr wrap="square" lIns="0" tIns="0" rIns="0" bIns="0" rtlCol="0" anchor="t"/>
           <a:lstStyle/>
           <a:p>
-            <a:pPr indent="0" marL="0">
+            <a:pPr marL="0" indent="0">
               <a:buNone/>
             </a:pPr>
             <a:r>
@@ -5450,13 +5415,13 @@
             <a:endParaRPr lang="en-US" sz="1400" dirty="0"/>
           </a:p>
           <a:p>
-            <a:pPr indent="0" marL="0">
+            <a:pPr marL="0" indent="0">
               <a:buNone/>
             </a:pPr>
             <a:endParaRPr lang="en-US" sz="1400" dirty="0"/>
           </a:p>
           <a:p>
-            <a:pPr indent="0" marL="0">
+            <a:pPr marL="0" indent="0">
               <a:buNone/>
             </a:pPr>
             <a:r>
@@ -5500,6 +5465,13 @@
             <a:prstDash val="solid"/>
           </a:ln>
         </p:spPr>
+        <p:txBody>
+          <a:bodyPr/>
+          <a:lstStyle/>
+          <a:p>
+            <a:endParaRPr lang="de-CH"/>
+          </a:p>
+        </p:txBody>
       </p:sp>
       <p:sp>
         <p:nvSpPr>
@@ -5522,7 +5494,7 @@
           <a:bodyPr wrap="square" lIns="0" tIns="0" rIns="0" bIns="0" rtlCol="0" anchor="ctr"/>
           <a:lstStyle/>
           <a:p>
-            <a:pPr algn="ctr" indent="0" marL="0">
+            <a:pPr marL="0" indent="0" algn="ctr">
               <a:buNone/>
             </a:pPr>
             <a:r>
@@ -5566,6 +5538,13 @@
             <a:prstDash val="solid"/>
           </a:ln>
         </p:spPr>
+        <p:txBody>
+          <a:bodyPr/>
+          <a:lstStyle/>
+          <a:p>
+            <a:endParaRPr lang="de-CH"/>
+          </a:p>
+        </p:txBody>
       </p:sp>
       <p:sp>
         <p:nvSpPr>
@@ -5588,7 +5567,7 @@
           <a:bodyPr wrap="square" lIns="0" tIns="0" rIns="0" bIns="0" rtlCol="0" anchor="t"/>
           <a:lstStyle/>
           <a:p>
-            <a:pPr indent="0" marL="0">
+            <a:pPr marL="0" indent="0">
               <a:buNone/>
             </a:pPr>
             <a:r>
@@ -5627,7 +5606,7 @@
           <a:bodyPr wrap="square" lIns="0" tIns="0" rIns="0" bIns="0" rtlCol="0" anchor="t"/>
           <a:lstStyle/>
           <a:p>
-            <a:pPr indent="0" marL="0">
+            <a:pPr marL="0" indent="0">
               <a:buNone/>
             </a:pPr>
             <a:r>
@@ -5644,13 +5623,13 @@
             <a:endParaRPr lang="en-US" sz="1400" dirty="0"/>
           </a:p>
           <a:p>
-            <a:pPr indent="0" marL="0">
+            <a:pPr marL="0" indent="0">
               <a:buNone/>
             </a:pPr>
             <a:endParaRPr lang="en-US" sz="1400" dirty="0"/>
           </a:p>
           <a:p>
-            <a:pPr indent="0" marL="0">
+            <a:pPr marL="0" indent="0">
               <a:buNone/>
             </a:pPr>
             <a:r>
@@ -5689,11 +5668,11 @@
           <a:bodyPr wrap="square" rtlCol="0" anchor="ctr"/>
           <a:lstStyle/>
           <a:p>
-            <a:pPr indent="0" marL="0">
-              <a:buNone/>
-            </a:pPr>
-            <a:r>
-              <a:rPr lang="en-US" sz="900" spc="200" kern="0" dirty="0">
+            <a:pPr marL="0" indent="0">
+              <a:buNone/>
+            </a:pPr>
+            <a:r>
+              <a:rPr lang="en-US" sz="900" kern="0" spc="200" dirty="0">
                 <a:solidFill>
                   <a:srgbClr val="7A8A95"/>
                 </a:solidFill>
@@ -5728,7 +5707,7 @@
           <a:bodyPr wrap="square" rtlCol="0" anchor="ctr"/>
           <a:lstStyle/>
           <a:p>
-            <a:pPr algn="r" indent="0" marL="0">
+            <a:pPr marL="0" indent="0" algn="r">
               <a:buNone/>
             </a:pPr>
             <a:r>
@@ -5762,6 +5741,7 @@
         <a:solidFill>
           <a:srgbClr val="FFFFFF"/>
         </a:solidFill>
+        <a:effectLst/>
       </p:bgPr>
     </p:bg>
     <p:spTree>
@@ -5799,7 +5779,7 @@
           <a:bodyPr wrap="square" lIns="0" tIns="0" rIns="0" bIns="0" rtlCol="0" anchor="t"/>
           <a:lstStyle/>
           <a:p>
-            <a:pPr indent="0" marL="0">
+            <a:pPr marL="0" indent="0">
               <a:buNone/>
             </a:pPr>
             <a:r>
@@ -5838,7 +5818,7 @@
           <a:bodyPr wrap="square" rtlCol="0" anchor="ctr"/>
           <a:lstStyle/>
           <a:p>
-            <a:pPr indent="0" marL="0">
+            <a:pPr marL="0" indent="0">
               <a:buNone/>
             </a:pPr>
             <a:r>
@@ -5882,6 +5862,13 @@
             <a:prstDash val="solid"/>
           </a:ln>
         </p:spPr>
+        <p:txBody>
+          <a:bodyPr/>
+          <a:lstStyle/>
+          <a:p>
+            <a:endParaRPr lang="de-CH"/>
+          </a:p>
+        </p:txBody>
       </p:sp>
       <p:sp>
         <p:nvSpPr>
@@ -5904,7 +5891,7 @@
           <a:bodyPr wrap="square" lIns="0" tIns="0" rIns="0" bIns="0" rtlCol="0" anchor="ctr"/>
           <a:lstStyle/>
           <a:p>
-            <a:pPr algn="ctr" indent="0" marL="0">
+            <a:pPr marL="0" indent="0" algn="ctr">
               <a:buNone/>
             </a:pPr>
             <a:r>
@@ -5943,7 +5930,7 @@
           <a:bodyPr wrap="square" lIns="0" tIns="0" rIns="0" bIns="0" rtlCol="0" anchor="ctr"/>
           <a:lstStyle/>
           <a:p>
-            <a:pPr indent="0" marL="0">
+            <a:pPr marL="0" indent="0">
               <a:buNone/>
             </a:pPr>
             <a:r>
@@ -5987,6 +5974,13 @@
             <a:prstDash val="solid"/>
           </a:ln>
         </p:spPr>
+        <p:txBody>
+          <a:bodyPr/>
+          <a:lstStyle/>
+          <a:p>
+            <a:endParaRPr lang="de-CH"/>
+          </a:p>
+        </p:txBody>
       </p:sp>
       <p:sp>
         <p:nvSpPr>
@@ -6009,7 +6003,7 @@
           <a:bodyPr wrap="square" lIns="0" tIns="0" rIns="0" bIns="0" rtlCol="0" anchor="ctr"/>
           <a:lstStyle/>
           <a:p>
-            <a:pPr algn="ctr" indent="0" marL="0">
+            <a:pPr marL="0" indent="0" algn="ctr">
               <a:buNone/>
             </a:pPr>
             <a:r>
@@ -6048,7 +6042,7 @@
           <a:bodyPr wrap="square" lIns="0" tIns="0" rIns="0" bIns="0" rtlCol="0" anchor="ctr"/>
           <a:lstStyle/>
           <a:p>
-            <a:pPr indent="0" marL="0">
+            <a:pPr marL="0" indent="0">
               <a:buNone/>
             </a:pPr>
             <a:r>
@@ -6092,6 +6086,13 @@
             <a:prstDash val="solid"/>
           </a:ln>
         </p:spPr>
+        <p:txBody>
+          <a:bodyPr/>
+          <a:lstStyle/>
+          <a:p>
+            <a:endParaRPr lang="de-CH"/>
+          </a:p>
+        </p:txBody>
       </p:sp>
       <p:sp>
         <p:nvSpPr>
@@ -6114,7 +6115,7 @@
           <a:bodyPr wrap="square" lIns="0" tIns="0" rIns="0" bIns="0" rtlCol="0" anchor="ctr"/>
           <a:lstStyle/>
           <a:p>
-            <a:pPr algn="ctr" indent="0" marL="0">
+            <a:pPr marL="0" indent="0" algn="ctr">
               <a:buNone/>
             </a:pPr>
             <a:r>
@@ -6153,7 +6154,7 @@
           <a:bodyPr wrap="square" lIns="0" tIns="0" rIns="0" bIns="0" rtlCol="0" anchor="ctr"/>
           <a:lstStyle/>
           <a:p>
-            <a:pPr indent="0" marL="0">
+            <a:pPr marL="0" indent="0">
               <a:buNone/>
             </a:pPr>
             <a:r>
@@ -6197,6 +6198,13 @@
             <a:prstDash val="solid"/>
           </a:ln>
         </p:spPr>
+        <p:txBody>
+          <a:bodyPr/>
+          <a:lstStyle/>
+          <a:p>
+            <a:endParaRPr lang="de-CH"/>
+          </a:p>
+        </p:txBody>
       </p:sp>
       <p:sp>
         <p:nvSpPr>
@@ -6219,7 +6227,7 @@
           <a:bodyPr wrap="square" lIns="0" tIns="0" rIns="0" bIns="0" rtlCol="0" anchor="ctr"/>
           <a:lstStyle/>
           <a:p>
-            <a:pPr algn="ctr" indent="0" marL="0">
+            <a:pPr marL="0" indent="0" algn="ctr">
               <a:buNone/>
             </a:pPr>
             <a:r>
@@ -6258,7 +6266,7 @@
           <a:bodyPr wrap="square" lIns="0" tIns="0" rIns="0" bIns="0" rtlCol="0" anchor="ctr"/>
           <a:lstStyle/>
           <a:p>
-            <a:pPr indent="0" marL="0">
+            <a:pPr marL="0" indent="0">
               <a:buNone/>
             </a:pPr>
             <a:r>
@@ -6302,6 +6310,13 @@
             <a:prstDash val="solid"/>
           </a:ln>
         </p:spPr>
+        <p:txBody>
+          <a:bodyPr/>
+          <a:lstStyle/>
+          <a:p>
+            <a:endParaRPr lang="de-CH"/>
+          </a:p>
+        </p:txBody>
       </p:sp>
       <p:sp>
         <p:nvSpPr>
@@ -6324,7 +6339,7 @@
           <a:bodyPr wrap="square" lIns="0" tIns="0" rIns="0" bIns="0" rtlCol="0" anchor="ctr"/>
           <a:lstStyle/>
           <a:p>
-            <a:pPr algn="ctr" indent="0" marL="0">
+            <a:pPr marL="0" indent="0" algn="ctr">
               <a:buNone/>
             </a:pPr>
             <a:r>
@@ -6363,7 +6378,7 @@
           <a:bodyPr wrap="square" lIns="0" tIns="0" rIns="0" bIns="0" rtlCol="0" anchor="ctr"/>
           <a:lstStyle/>
           <a:p>
-            <a:pPr indent="0" marL="0">
+            <a:pPr marL="0" indent="0">
               <a:buNone/>
             </a:pPr>
             <a:r>
@@ -6407,6 +6422,13 @@
             <a:prstDash val="solid"/>
           </a:ln>
         </p:spPr>
+        <p:txBody>
+          <a:bodyPr/>
+          <a:lstStyle/>
+          <a:p>
+            <a:endParaRPr lang="de-CH"/>
+          </a:p>
+        </p:txBody>
       </p:sp>
       <p:sp>
         <p:nvSpPr>
@@ -6429,7 +6451,7 @@
           <a:bodyPr wrap="square" lIns="0" tIns="0" rIns="0" bIns="0" rtlCol="0" anchor="ctr"/>
           <a:lstStyle/>
           <a:p>
-            <a:pPr algn="ctr" indent="0" marL="0">
+            <a:pPr marL="0" indent="0" algn="ctr">
               <a:buNone/>
             </a:pPr>
             <a:r>
@@ -6468,7 +6490,7 @@
           <a:bodyPr wrap="square" lIns="0" tIns="0" rIns="0" bIns="0" rtlCol="0" anchor="ctr"/>
           <a:lstStyle/>
           <a:p>
-            <a:pPr indent="0" marL="0">
+            <a:pPr marL="0" indent="0">
               <a:buNone/>
             </a:pPr>
             <a:r>
@@ -6512,6 +6534,13 @@
             <a:prstDash val="solid"/>
           </a:ln>
         </p:spPr>
+        <p:txBody>
+          <a:bodyPr/>
+          <a:lstStyle/>
+          <a:p>
+            <a:endParaRPr lang="de-CH"/>
+          </a:p>
+        </p:txBody>
       </p:sp>
       <p:sp>
         <p:nvSpPr>
@@ -6534,7 +6563,7 @@
           <a:bodyPr wrap="square" lIns="0" tIns="0" rIns="0" bIns="0" rtlCol="0" anchor="ctr"/>
           <a:lstStyle/>
           <a:p>
-            <a:pPr algn="ctr" indent="0" marL="0">
+            <a:pPr marL="0" indent="0" algn="ctr">
               <a:buNone/>
             </a:pPr>
             <a:r>
@@ -6573,7 +6602,7 @@
           <a:bodyPr wrap="square" lIns="0" tIns="0" rIns="0" bIns="0" rtlCol="0" anchor="ctr"/>
           <a:lstStyle/>
           <a:p>
-            <a:pPr indent="0" marL="0">
+            <a:pPr marL="0" indent="0">
               <a:buNone/>
             </a:pPr>
             <a:r>
@@ -6612,11 +6641,11 @@
           <a:bodyPr wrap="square" rtlCol="0" anchor="ctr"/>
           <a:lstStyle/>
           <a:p>
-            <a:pPr indent="0" marL="0">
-              <a:buNone/>
-            </a:pPr>
-            <a:r>
-              <a:rPr lang="en-US" sz="900" spc="200" kern="0" dirty="0">
+            <a:pPr marL="0" indent="0">
+              <a:buNone/>
+            </a:pPr>
+            <a:r>
+              <a:rPr lang="en-US" sz="900" kern="0" spc="200" dirty="0">
                 <a:solidFill>
                   <a:srgbClr val="7A8A95"/>
                 </a:solidFill>
@@ -6651,7 +6680,7 @@
           <a:bodyPr wrap="square" rtlCol="0" anchor="ctr"/>
           <a:lstStyle/>
           <a:p>
-            <a:pPr algn="r" indent="0" marL="0">
+            <a:pPr marL="0" indent="0" algn="r">
               <a:buNone/>
             </a:pPr>
             <a:r>
@@ -6685,6 +6714,7 @@
         <a:solidFill>
           <a:srgbClr val="FFFFFF"/>
         </a:solidFill>
+        <a:effectLst/>
       </p:bgPr>
     </p:bg>
     <p:spTree>
@@ -6722,7 +6752,7 @@
           <a:bodyPr wrap="square" lIns="0" tIns="0" rIns="0" bIns="0" rtlCol="0" anchor="t"/>
           <a:lstStyle/>
           <a:p>
-            <a:pPr indent="0" marL="0">
+            <a:pPr marL="0" indent="0">
               <a:buNone/>
             </a:pPr>
             <a:r>
@@ -6749,22 +6779,34 @@
           <p:nvPr>
             <p:extLst>
               <p:ext uri="{D42A27DB-BD31-4B8C-83A1-F6EECF244321}">
-                <p14:modId xmlns:p14="http://schemas.microsoft.com/office/powerpoint/2010/main" val="1579011935"/>
+                <p14:modId xmlns:p14="http://schemas.microsoft.com/office/powerpoint/2010/main" val="4198797860"/>
               </p:ext>
             </p:extLst>
           </p:nvPr>
         </p:nvGraphicFramePr>
         <p:xfrm>
-          <a:off x="548640" y="1920240"/>
-          <a:ext cx="8046720" cy="914400"/>
+          <a:off x="548640" y="1257300"/>
+          <a:ext cx="8046720" cy="3429000"/>
         </p:xfrm>
         <a:graphic>
           <a:graphicData uri="http://schemas.openxmlformats.org/drawingml/2006/table">
             <a:tbl>
               <a:tblPr/>
               <a:tblGrid>
-                <a:gridCol w="3200400"/>
-                <a:gridCol w="4846320"/>
+                <a:gridCol w="3200400">
+                  <a:extLst>
+                    <a:ext uri="{9D8B030D-6E8A-4147-A177-3AD203B41FA5}">
+                      <a16:colId xmlns:a16="http://schemas.microsoft.com/office/drawing/2014/main" val="20000"/>
+                    </a:ext>
+                  </a:extLst>
+                </a:gridCol>
+                <a:gridCol w="4846320">
+                  <a:extLst>
+                    <a:ext uri="{9D8B030D-6E8A-4147-A177-3AD203B41FA5}">
+                      <a16:colId xmlns:a16="http://schemas.microsoft.com/office/drawing/2014/main" val="20001"/>
+                    </a:ext>
+                  </a:extLst>
+                </a:gridCol>
               </a:tblGrid>
               <a:tr h="457200">
                 <a:tc>
@@ -6772,11 +6814,11 @@
                     <a:bodyPr/>
                     <a:lstStyle/>
                     <a:p>
-                      <a:pPr indent="0" marL="0">
+                      <a:pPr marL="0" indent="0">
                         <a:buNone/>
                       </a:pPr>
                       <a:r>
-                        <a:rPr lang="en-US" sz="1100" b="1" spc="300" kern="0" dirty="0">
+                        <a:rPr lang="en-US" sz="1100" b="1" kern="0" spc="300" dirty="0">
                           <a:solidFill>
                             <a:srgbClr val="7A8A95"/>
                           </a:solidFill>
@@ -6793,7 +6835,7 @@
                       </a:endParaRPr>
                     </a:p>
                   </a:txBody>
-                  <a:tcPr marL="91440" marR="91440" marT="45720" marB="45720">
+                  <a:tcPr>
                     <a:lnL w="0" cap="flat" cmpd="sng" algn="ctr">
                       <a:solidFill>
                         <a:srgbClr val="FFFFFF"/>
@@ -6840,11 +6882,11 @@
                     <a:bodyPr/>
                     <a:lstStyle/>
                     <a:p>
-                      <a:pPr indent="0" marL="0">
+                      <a:pPr marL="0" indent="0">
                         <a:buNone/>
                       </a:pPr>
                       <a:r>
-                        <a:rPr lang="en-US" sz="1100" b="1" spc="300" kern="0" dirty="0">
+                        <a:rPr lang="en-US" sz="1100" b="1" kern="0" spc="300" dirty="0">
                           <a:solidFill>
                             <a:srgbClr val="DC822E"/>
                           </a:solidFill>
@@ -6861,7 +6903,7 @@
                       </a:endParaRPr>
                     </a:p>
                   </a:txBody>
-                  <a:tcPr marL="91440" marR="91440" marT="45720" marB="45720">
+                  <a:tcPr>
                     <a:lnL w="0" cap="flat" cmpd="sng" algn="ctr">
                       <a:solidFill>
                         <a:srgbClr val="FFFFFF"/>
@@ -6903,6 +6945,11 @@
                     </a:solidFill>
                   </a:tcPr>
                 </a:tc>
+                <a:extLst>
+                  <a:ext uri="{0D108BD9-81ED-4DB2-BD59-A6C34878D82A}">
+                    <a16:rowId xmlns:a16="http://schemas.microsoft.com/office/drawing/2014/main" val="10000"/>
+                  </a:ext>
+                </a:extLst>
               </a:tr>
               <a:tr h="594360">
                 <a:tc>
@@ -6910,7 +6957,7 @@
                     <a:bodyPr/>
                     <a:lstStyle/>
                     <a:p>
-                      <a:pPr indent="0" marL="0">
+                      <a:pPr marL="0" indent="0">
                         <a:buNone/>
                       </a:pPr>
                       <a:r>
@@ -6931,7 +6978,7 @@
                       </a:endParaRPr>
                     </a:p>
                   </a:txBody>
-                  <a:tcPr marL="91440" marR="91440" marT="45720" marB="45720">
+                  <a:tcPr>
                     <a:lnL w="0" cap="flat" cmpd="sng" algn="ctr">
                       <a:solidFill>
                         <a:srgbClr val="FFFFFF"/>
@@ -6978,7 +7025,7 @@
                     <a:bodyPr/>
                     <a:lstStyle/>
                     <a:p>
-                      <a:pPr indent="0" marL="0">
+                      <a:pPr marL="0" indent="0">
                         <a:buNone/>
                       </a:pPr>
                       <a:r>
@@ -6999,7 +7046,7 @@
                       </a:endParaRPr>
                     </a:p>
                   </a:txBody>
-                  <a:tcPr marL="91440" marR="91440" marT="45720" marB="45720">
+                  <a:tcPr>
                     <a:lnL w="0" cap="flat" cmpd="sng" algn="ctr">
                       <a:solidFill>
                         <a:srgbClr val="FFFFFF"/>
@@ -7041,6 +7088,11 @@
                     </a:solidFill>
                   </a:tcPr>
                 </a:tc>
+                <a:extLst>
+                  <a:ext uri="{0D108BD9-81ED-4DB2-BD59-A6C34878D82A}">
+                    <a16:rowId xmlns:a16="http://schemas.microsoft.com/office/drawing/2014/main" val="10001"/>
+                  </a:ext>
+                </a:extLst>
               </a:tr>
               <a:tr h="594360">
                 <a:tc>
@@ -7048,7 +7100,7 @@
                     <a:bodyPr/>
                     <a:lstStyle/>
                     <a:p>
-                      <a:pPr indent="0" marL="0">
+                      <a:pPr marL="0" indent="0">
                         <a:buNone/>
                       </a:pPr>
                       <a:r>
@@ -7069,7 +7121,7 @@
                       </a:endParaRPr>
                     </a:p>
                   </a:txBody>
-                  <a:tcPr marL="91440" marR="91440" marT="45720" marB="45720">
+                  <a:tcPr>
                     <a:lnL w="0" cap="flat" cmpd="sng" algn="ctr">
                       <a:solidFill>
                         <a:srgbClr val="FFFFFF"/>
@@ -7116,7 +7168,7 @@
                     <a:bodyPr/>
                     <a:lstStyle/>
                     <a:p>
-                      <a:pPr indent="0" marL="0">
+                      <a:pPr marL="0" indent="0">
                         <a:buNone/>
                       </a:pPr>
                       <a:r>
@@ -7137,7 +7189,7 @@
                       </a:endParaRPr>
                     </a:p>
                   </a:txBody>
-                  <a:tcPr marL="91440" marR="91440" marT="45720" marB="45720">
+                  <a:tcPr>
                     <a:lnL w="0" cap="flat" cmpd="sng" algn="ctr">
                       <a:solidFill>
                         <a:srgbClr val="FFFFFF"/>
@@ -7179,6 +7231,11 @@
                     </a:solidFill>
                   </a:tcPr>
                 </a:tc>
+                <a:extLst>
+                  <a:ext uri="{0D108BD9-81ED-4DB2-BD59-A6C34878D82A}">
+                    <a16:rowId xmlns:a16="http://schemas.microsoft.com/office/drawing/2014/main" val="10002"/>
+                  </a:ext>
+                </a:extLst>
               </a:tr>
               <a:tr h="594360">
                 <a:tc>
@@ -7186,7 +7243,7 @@
                     <a:bodyPr/>
                     <a:lstStyle/>
                     <a:p>
-                      <a:pPr indent="0" marL="0">
+                      <a:pPr marL="0" indent="0">
                         <a:buNone/>
                       </a:pPr>
                       <a:r>
@@ -7207,7 +7264,7 @@
                       </a:endParaRPr>
                     </a:p>
                   </a:txBody>
-                  <a:tcPr marL="91440" marR="91440" marT="45720" marB="45720">
+                  <a:tcPr>
                     <a:lnL w="0" cap="flat" cmpd="sng" algn="ctr">
                       <a:solidFill>
                         <a:srgbClr val="FFFFFF"/>
@@ -7254,7 +7311,7 @@
                     <a:bodyPr/>
                     <a:lstStyle/>
                     <a:p>
-                      <a:pPr indent="0" marL="0">
+                      <a:pPr marL="0" indent="0">
                         <a:buNone/>
                       </a:pPr>
                       <a:r>
@@ -7275,7 +7332,7 @@
                       </a:endParaRPr>
                     </a:p>
                   </a:txBody>
-                  <a:tcPr marL="91440" marR="91440" marT="45720" marB="45720">
+                  <a:tcPr>
                     <a:lnL w="0" cap="flat" cmpd="sng" algn="ctr">
                       <a:solidFill>
                         <a:srgbClr val="FFFFFF"/>
@@ -7317,6 +7374,11 @@
                     </a:solidFill>
                   </a:tcPr>
                 </a:tc>
+                <a:extLst>
+                  <a:ext uri="{0D108BD9-81ED-4DB2-BD59-A6C34878D82A}">
+                    <a16:rowId xmlns:a16="http://schemas.microsoft.com/office/drawing/2014/main" val="10003"/>
+                  </a:ext>
+                </a:extLst>
               </a:tr>
               <a:tr h="594360">
                 <a:tc>
@@ -7324,7 +7386,7 @@
                     <a:bodyPr/>
                     <a:lstStyle/>
                     <a:p>
-                      <a:pPr indent="0" marL="0">
+                      <a:pPr marL="0" indent="0">
                         <a:buNone/>
                       </a:pPr>
                       <a:r>
@@ -7345,7 +7407,7 @@
                       </a:endParaRPr>
                     </a:p>
                   </a:txBody>
-                  <a:tcPr marL="91440" marR="91440" marT="45720" marB="45720">
+                  <a:tcPr>
                     <a:lnL w="0" cap="flat" cmpd="sng" algn="ctr">
                       <a:solidFill>
                         <a:srgbClr val="FFFFFF"/>
@@ -7392,7 +7454,7 @@
                     <a:bodyPr/>
                     <a:lstStyle/>
                     <a:p>
-                      <a:pPr indent="0" marL="0">
+                      <a:pPr marL="0" indent="0">
                         <a:buNone/>
                       </a:pPr>
                       <a:r>
@@ -7413,7 +7475,7 @@
                       </a:endParaRPr>
                     </a:p>
                   </a:txBody>
-                  <a:tcPr marL="91440" marR="91440" marT="45720" marB="45720">
+                  <a:tcPr>
                     <a:lnL w="0" cap="flat" cmpd="sng" algn="ctr">
                       <a:solidFill>
                         <a:srgbClr val="FFFFFF"/>
@@ -7455,6 +7517,11 @@
                     </a:solidFill>
                   </a:tcPr>
                 </a:tc>
+                <a:extLst>
+                  <a:ext uri="{0D108BD9-81ED-4DB2-BD59-A6C34878D82A}">
+                    <a16:rowId xmlns:a16="http://schemas.microsoft.com/office/drawing/2014/main" val="10004"/>
+                  </a:ext>
+                </a:extLst>
               </a:tr>
               <a:tr h="594360">
                 <a:tc>
@@ -7462,7 +7529,7 @@
                     <a:bodyPr/>
                     <a:lstStyle/>
                     <a:p>
-                      <a:pPr indent="0" marL="0">
+                      <a:pPr marL="0" indent="0">
                         <a:buNone/>
                       </a:pPr>
                       <a:r>
@@ -7483,7 +7550,7 @@
                       </a:endParaRPr>
                     </a:p>
                   </a:txBody>
-                  <a:tcPr marL="91440" marR="91440" marT="45720" marB="45720">
+                  <a:tcPr>
                     <a:lnL w="0" cap="flat" cmpd="sng" algn="ctr">
                       <a:solidFill>
                         <a:srgbClr val="FFFFFF"/>
@@ -7530,7 +7597,7 @@
                     <a:bodyPr/>
                     <a:lstStyle/>
                     <a:p>
-                      <a:pPr indent="0" marL="0">
+                      <a:pPr marL="0" indent="0">
                         <a:buNone/>
                       </a:pPr>
                       <a:r>
@@ -7551,7 +7618,7 @@
                       </a:endParaRPr>
                     </a:p>
                   </a:txBody>
-                  <a:tcPr marL="91440" marR="91440" marT="45720" marB="45720">
+                  <a:tcPr>
                     <a:lnL w="0" cap="flat" cmpd="sng" algn="ctr">
                       <a:solidFill>
                         <a:srgbClr val="FFFFFF"/>
@@ -7593,6 +7660,11 @@
                     </a:solidFill>
                   </a:tcPr>
                 </a:tc>
+                <a:extLst>
+                  <a:ext uri="{0D108BD9-81ED-4DB2-BD59-A6C34878D82A}">
+                    <a16:rowId xmlns:a16="http://schemas.microsoft.com/office/drawing/2014/main" val="10005"/>
+                  </a:ext>
+                </a:extLst>
               </a:tr>
             </a:tbl>
           </a:graphicData>
@@ -7619,11 +7691,11 @@
           <a:bodyPr wrap="square" rtlCol="0" anchor="ctr"/>
           <a:lstStyle/>
           <a:p>
-            <a:pPr indent="0" marL="0">
-              <a:buNone/>
-            </a:pPr>
-            <a:r>
-              <a:rPr lang="en-US" sz="900" spc="200" kern="0" dirty="0">
+            <a:pPr marL="0" indent="0">
+              <a:buNone/>
+            </a:pPr>
+            <a:r>
+              <a:rPr lang="en-US" sz="900" kern="0" spc="200" dirty="0">
                 <a:solidFill>
                   <a:srgbClr val="7A8A95"/>
                 </a:solidFill>
@@ -7658,7 +7730,7 @@
           <a:bodyPr wrap="square" rtlCol="0" anchor="ctr"/>
           <a:lstStyle/>
           <a:p>
-            <a:pPr algn="r" indent="0" marL="0">
+            <a:pPr marL="0" indent="0" algn="r">
               <a:buNone/>
             </a:pPr>
             <a:r>
@@ -7692,6 +7764,7 @@
         <a:solidFill>
           <a:srgbClr val="FFFFFF"/>
         </a:solidFill>
+        <a:effectLst/>
       </p:bgPr>
     </p:bg>
     <p:spTree>
@@ -7729,7 +7802,7 @@
           <a:bodyPr wrap="square" lIns="0" tIns="0" rIns="0" bIns="0" rtlCol="0" anchor="t"/>
           <a:lstStyle/>
           <a:p>
-            <a:pPr indent="0" marL="0">
+            <a:pPr marL="0" indent="0">
               <a:buNone/>
             </a:pPr>
             <a:r>
@@ -7768,7 +7841,7 @@
           <a:bodyPr wrap="square" rtlCol="0" anchor="ctr"/>
           <a:lstStyle/>
           <a:p>
-            <a:pPr indent="0" marL="0">
+            <a:pPr marL="0" indent="0">
               <a:buNone/>
             </a:pPr>
             <a:r>
@@ -7802,16 +7875,34 @@
         </p:nvGraphicFramePr>
         <p:xfrm>
           <a:off x="457200" y="1371600"/>
-          <a:ext cx="8229600" cy="914400"/>
+          <a:ext cx="8229600" cy="2651760"/>
         </p:xfrm>
         <a:graphic>
           <a:graphicData uri="http://schemas.openxmlformats.org/drawingml/2006/table">
             <a:tbl>
               <a:tblPr/>
               <a:tblGrid>
-                <a:gridCol w="1371600"/>
-                <a:gridCol w="3383280"/>
-                <a:gridCol w="3474720"/>
+                <a:gridCol w="1371600">
+                  <a:extLst>
+                    <a:ext uri="{9D8B030D-6E8A-4147-A177-3AD203B41FA5}">
+                      <a16:colId xmlns:a16="http://schemas.microsoft.com/office/drawing/2014/main" val="20000"/>
+                    </a:ext>
+                  </a:extLst>
+                </a:gridCol>
+                <a:gridCol w="3383280">
+                  <a:extLst>
+                    <a:ext uri="{9D8B030D-6E8A-4147-A177-3AD203B41FA5}">
+                      <a16:colId xmlns:a16="http://schemas.microsoft.com/office/drawing/2014/main" val="20001"/>
+                    </a:ext>
+                  </a:extLst>
+                </a:gridCol>
+                <a:gridCol w="3474720">
+                  <a:extLst>
+                    <a:ext uri="{9D8B030D-6E8A-4147-A177-3AD203B41FA5}">
+                      <a16:colId xmlns:a16="http://schemas.microsoft.com/office/drawing/2014/main" val="20002"/>
+                    </a:ext>
+                  </a:extLst>
+                </a:gridCol>
               </a:tblGrid>
               <a:tr h="365760">
                 <a:tc>
@@ -7819,7 +7910,7 @@
                     <a:bodyPr/>
                     <a:lstStyle/>
                     <a:p>
-                      <a:pPr indent="0" marL="0">
+                      <a:pPr marL="0" indent="0">
                         <a:buNone/>
                       </a:pPr>
                       <a:r>
@@ -7840,7 +7931,7 @@
                       </a:endParaRPr>
                     </a:p>
                   </a:txBody>
-                  <a:tcPr marL="91440" marR="91440" marT="45720" marB="45720">
+                  <a:tcPr>
                     <a:lnL w="0" cap="flat" cmpd="sng" algn="ctr">
                       <a:solidFill>
                         <a:srgbClr val="FFFFFF"/>
@@ -7887,7 +7978,7 @@
                     <a:bodyPr/>
                     <a:lstStyle/>
                     <a:p>
-                      <a:pPr indent="0" marL="0">
+                      <a:pPr marL="0" indent="0">
                         <a:buNone/>
                       </a:pPr>
                       <a:r>
@@ -7908,7 +7999,7 @@
                       </a:endParaRPr>
                     </a:p>
                   </a:txBody>
-                  <a:tcPr marL="91440" marR="91440" marT="45720" marB="45720">
+                  <a:tcPr>
                     <a:lnL w="0" cap="flat" cmpd="sng" algn="ctr">
                       <a:solidFill>
                         <a:srgbClr val="FFFFFF"/>
@@ -7955,7 +8046,7 @@
                     <a:bodyPr/>
                     <a:lstStyle/>
                     <a:p>
-                      <a:pPr indent="0" marL="0">
+                      <a:pPr marL="0" indent="0">
                         <a:buNone/>
                       </a:pPr>
                       <a:r>
@@ -7976,7 +8067,7 @@
                       </a:endParaRPr>
                     </a:p>
                   </a:txBody>
-                  <a:tcPr marL="91440" marR="91440" marT="45720" marB="45720">
+                  <a:tcPr>
                     <a:lnL w="0" cap="flat" cmpd="sng" algn="ctr">
                       <a:solidFill>
                         <a:srgbClr val="FFFFFF"/>
@@ -8018,6 +8109,11 @@
                     </a:solidFill>
                   </a:tcPr>
                 </a:tc>
+                <a:extLst>
+                  <a:ext uri="{0D108BD9-81ED-4DB2-BD59-A6C34878D82A}">
+                    <a16:rowId xmlns:a16="http://schemas.microsoft.com/office/drawing/2014/main" val="10000"/>
+                  </a:ext>
+                </a:extLst>
               </a:tr>
               <a:tr h="457200">
                 <a:tc>
@@ -8025,7 +8121,7 @@
                     <a:bodyPr/>
                     <a:lstStyle/>
                     <a:p>
-                      <a:pPr indent="0" marL="0">
+                      <a:pPr marL="0" indent="0">
                         <a:buNone/>
                       </a:pPr>
                       <a:r>
@@ -8046,7 +8142,7 @@
                       </a:endParaRPr>
                     </a:p>
                   </a:txBody>
-                  <a:tcPr marL="91440" marR="91440" marT="45720" marB="45720">
+                  <a:tcPr>
                     <a:lnL w="0" cap="flat" cmpd="sng" algn="ctr">
                       <a:solidFill>
                         <a:srgbClr val="FFFFFF"/>
@@ -8093,7 +8189,7 @@
                     <a:bodyPr/>
                     <a:lstStyle/>
                     <a:p>
-                      <a:pPr indent="0" marL="0">
+                      <a:pPr marL="0" indent="0">
                         <a:buNone/>
                       </a:pPr>
                       <a:r>
@@ -8114,7 +8210,7 @@
                       </a:endParaRPr>
                     </a:p>
                   </a:txBody>
-                  <a:tcPr marL="91440" marR="91440" marT="45720" marB="45720">
+                  <a:tcPr>
                     <a:lnL w="0" cap="flat" cmpd="sng" algn="ctr">
                       <a:solidFill>
                         <a:srgbClr val="FFFFFF"/>
@@ -8161,7 +8257,7 @@
                     <a:bodyPr/>
                     <a:lstStyle/>
                     <a:p>
-                      <a:pPr indent="0" marL="0">
+                      <a:pPr marL="0" indent="0">
                         <a:buNone/>
                       </a:pPr>
                       <a:r>
@@ -8182,7 +8278,7 @@
                       </a:endParaRPr>
                     </a:p>
                   </a:txBody>
-                  <a:tcPr marL="91440" marR="91440" marT="45720" marB="45720">
+                  <a:tcPr>
                     <a:lnL w="0" cap="flat" cmpd="sng" algn="ctr">
                       <a:solidFill>
                         <a:srgbClr val="FFFFFF"/>
@@ -8224,6 +8320,11 @@
                     </a:solidFill>
                   </a:tcPr>
                 </a:tc>
+                <a:extLst>
+                  <a:ext uri="{0D108BD9-81ED-4DB2-BD59-A6C34878D82A}">
+                    <a16:rowId xmlns:a16="http://schemas.microsoft.com/office/drawing/2014/main" val="10001"/>
+                  </a:ext>
+                </a:extLst>
               </a:tr>
               <a:tr h="457200">
                 <a:tc>
@@ -8231,7 +8332,7 @@
                     <a:bodyPr/>
                     <a:lstStyle/>
                     <a:p>
-                      <a:pPr indent="0" marL="0">
+                      <a:pPr marL="0" indent="0">
                         <a:buNone/>
                       </a:pPr>
                       <a:r>
@@ -8252,7 +8353,7 @@
                       </a:endParaRPr>
                     </a:p>
                   </a:txBody>
-                  <a:tcPr marL="91440" marR="91440" marT="45720" marB="45720">
+                  <a:tcPr>
                     <a:lnL w="0" cap="flat" cmpd="sng" algn="ctr">
                       <a:solidFill>
                         <a:srgbClr val="FFFFFF"/>
@@ -8299,7 +8400,7 @@
                     <a:bodyPr/>
                     <a:lstStyle/>
                     <a:p>
-                      <a:pPr indent="0" marL="0">
+                      <a:pPr marL="0" indent="0">
                         <a:buNone/>
                       </a:pPr>
                       <a:r>
@@ -8320,7 +8421,7 @@
                       </a:endParaRPr>
                     </a:p>
                   </a:txBody>
-                  <a:tcPr marL="91440" marR="91440" marT="45720" marB="45720">
+                  <a:tcPr>
                     <a:lnL w="0" cap="flat" cmpd="sng" algn="ctr">
                       <a:solidFill>
                         <a:srgbClr val="FFFFFF"/>
@@ -8367,7 +8468,7 @@
                     <a:bodyPr/>
                     <a:lstStyle/>
                     <a:p>
-                      <a:pPr indent="0" marL="0">
+                      <a:pPr marL="0" indent="0">
                         <a:buNone/>
                       </a:pPr>
                       <a:r>
@@ -8388,7 +8489,7 @@
                       </a:endParaRPr>
                     </a:p>
                   </a:txBody>
-                  <a:tcPr marL="91440" marR="91440" marT="45720" marB="45720">
+                  <a:tcPr>
                     <a:lnL w="0" cap="flat" cmpd="sng" algn="ctr">
                       <a:solidFill>
                         <a:srgbClr val="FFFFFF"/>
@@ -8430,6 +8531,11 @@
                     </a:solidFill>
                   </a:tcPr>
                 </a:tc>
+                <a:extLst>
+                  <a:ext uri="{0D108BD9-81ED-4DB2-BD59-A6C34878D82A}">
+                    <a16:rowId xmlns:a16="http://schemas.microsoft.com/office/drawing/2014/main" val="10002"/>
+                  </a:ext>
+                </a:extLst>
               </a:tr>
               <a:tr h="457200">
                 <a:tc>
@@ -8437,7 +8543,7 @@
                     <a:bodyPr/>
                     <a:lstStyle/>
                     <a:p>
-                      <a:pPr indent="0" marL="0">
+                      <a:pPr marL="0" indent="0">
                         <a:buNone/>
                       </a:pPr>
                       <a:r>
@@ -8458,7 +8564,7 @@
                       </a:endParaRPr>
                     </a:p>
                   </a:txBody>
-                  <a:tcPr marL="91440" marR="91440" marT="45720" marB="45720">
+                  <a:tcPr>
                     <a:lnL w="0" cap="flat" cmpd="sng" algn="ctr">
                       <a:solidFill>
                         <a:srgbClr val="FFFFFF"/>
@@ -8505,7 +8611,7 @@
                     <a:bodyPr/>
                     <a:lstStyle/>
                     <a:p>
-                      <a:pPr indent="0" marL="0">
+                      <a:pPr marL="0" indent="0">
                         <a:buNone/>
                       </a:pPr>
                       <a:r>
@@ -8526,7 +8632,7 @@
                       </a:endParaRPr>
                     </a:p>
                   </a:txBody>
-                  <a:tcPr marL="91440" marR="91440" marT="45720" marB="45720">
+                  <a:tcPr>
                     <a:lnL w="0" cap="flat" cmpd="sng" algn="ctr">
                       <a:solidFill>
                         <a:srgbClr val="FFFFFF"/>
@@ -8573,7 +8679,7 @@
                     <a:bodyPr/>
                     <a:lstStyle/>
                     <a:p>
-                      <a:pPr indent="0" marL="0">
+                      <a:pPr marL="0" indent="0">
                         <a:buNone/>
                       </a:pPr>
                       <a:r>
@@ -8594,7 +8700,7 @@
                       </a:endParaRPr>
                     </a:p>
                   </a:txBody>
-                  <a:tcPr marL="91440" marR="91440" marT="45720" marB="45720">
+                  <a:tcPr>
                     <a:lnL w="0" cap="flat" cmpd="sng" algn="ctr">
                       <a:solidFill>
                         <a:srgbClr val="FFFFFF"/>
@@ -8636,6 +8742,11 @@
                     </a:solidFill>
                   </a:tcPr>
                 </a:tc>
+                <a:extLst>
+                  <a:ext uri="{0D108BD9-81ED-4DB2-BD59-A6C34878D82A}">
+                    <a16:rowId xmlns:a16="http://schemas.microsoft.com/office/drawing/2014/main" val="10003"/>
+                  </a:ext>
+                </a:extLst>
               </a:tr>
               <a:tr h="457200">
                 <a:tc>
@@ -8643,7 +8754,7 @@
                     <a:bodyPr/>
                     <a:lstStyle/>
                     <a:p>
-                      <a:pPr indent="0" marL="0">
+                      <a:pPr marL="0" indent="0">
                         <a:buNone/>
                       </a:pPr>
                       <a:r>
@@ -8664,7 +8775,7 @@
                       </a:endParaRPr>
                     </a:p>
                   </a:txBody>
-                  <a:tcPr marL="91440" marR="91440" marT="45720" marB="45720">
+                  <a:tcPr>
                     <a:lnL w="0" cap="flat" cmpd="sng" algn="ctr">
                       <a:solidFill>
                         <a:srgbClr val="FFFFFF"/>
@@ -8711,7 +8822,7 @@
                     <a:bodyPr/>
                     <a:lstStyle/>
                     <a:p>
-                      <a:pPr indent="0" marL="0">
+                      <a:pPr marL="0" indent="0">
                         <a:buNone/>
                       </a:pPr>
                       <a:r>
@@ -8732,7 +8843,7 @@
                       </a:endParaRPr>
                     </a:p>
                   </a:txBody>
-                  <a:tcPr marL="91440" marR="91440" marT="45720" marB="45720">
+                  <a:tcPr>
                     <a:lnL w="0" cap="flat" cmpd="sng" algn="ctr">
                       <a:solidFill>
                         <a:srgbClr val="FFFFFF"/>
@@ -8779,7 +8890,7 @@
                     <a:bodyPr/>
                     <a:lstStyle/>
                     <a:p>
-                      <a:pPr indent="0" marL="0">
+                      <a:pPr marL="0" indent="0">
                         <a:buNone/>
                       </a:pPr>
                       <a:r>
@@ -8800,7 +8911,7 @@
                       </a:endParaRPr>
                     </a:p>
                   </a:txBody>
-                  <a:tcPr marL="91440" marR="91440" marT="45720" marB="45720">
+                  <a:tcPr>
                     <a:lnL w="0" cap="flat" cmpd="sng" algn="ctr">
                       <a:solidFill>
                         <a:srgbClr val="FFFFFF"/>
@@ -8842,6 +8953,11 @@
                     </a:solidFill>
                   </a:tcPr>
                 </a:tc>
+                <a:extLst>
+                  <a:ext uri="{0D108BD9-81ED-4DB2-BD59-A6C34878D82A}">
+                    <a16:rowId xmlns:a16="http://schemas.microsoft.com/office/drawing/2014/main" val="10004"/>
+                  </a:ext>
+                </a:extLst>
               </a:tr>
               <a:tr h="457200">
                 <a:tc>
@@ -8849,7 +8965,7 @@
                     <a:bodyPr/>
                     <a:lstStyle/>
                     <a:p>
-                      <a:pPr indent="0" marL="0">
+                      <a:pPr marL="0" indent="0">
                         <a:buNone/>
                       </a:pPr>
                       <a:r>
@@ -8870,7 +8986,7 @@
                       </a:endParaRPr>
                     </a:p>
                   </a:txBody>
-                  <a:tcPr marL="91440" marR="91440" marT="45720" marB="45720">
+                  <a:tcPr>
                     <a:lnL w="0" cap="flat" cmpd="sng" algn="ctr">
                       <a:solidFill>
                         <a:srgbClr val="FFFFFF"/>
@@ -8917,7 +9033,7 @@
                     <a:bodyPr/>
                     <a:lstStyle/>
                     <a:p>
-                      <a:pPr indent="0" marL="0">
+                      <a:pPr marL="0" indent="0">
                         <a:buNone/>
                       </a:pPr>
                       <a:r>
@@ -8938,7 +9054,7 @@
                       </a:endParaRPr>
                     </a:p>
                   </a:txBody>
-                  <a:tcPr marL="91440" marR="91440" marT="45720" marB="45720">
+                  <a:tcPr>
                     <a:lnL w="0" cap="flat" cmpd="sng" algn="ctr">
                       <a:solidFill>
                         <a:srgbClr val="FFFFFF"/>
@@ -8985,7 +9101,7 @@
                     <a:bodyPr/>
                     <a:lstStyle/>
                     <a:p>
-                      <a:pPr indent="0" marL="0">
+                      <a:pPr marL="0" indent="0">
                         <a:buNone/>
                       </a:pPr>
                       <a:r>
@@ -9006,7 +9122,7 @@
                       </a:endParaRPr>
                     </a:p>
                   </a:txBody>
-                  <a:tcPr marL="91440" marR="91440" marT="45720" marB="45720">
+                  <a:tcPr>
                     <a:lnL w="0" cap="flat" cmpd="sng" algn="ctr">
                       <a:solidFill>
                         <a:srgbClr val="FFFFFF"/>
@@ -9048,6 +9164,11 @@
                     </a:solidFill>
                   </a:tcPr>
                 </a:tc>
+                <a:extLst>
+                  <a:ext uri="{0D108BD9-81ED-4DB2-BD59-A6C34878D82A}">
+                    <a16:rowId xmlns:a16="http://schemas.microsoft.com/office/drawing/2014/main" val="10005"/>
+                  </a:ext>
+                </a:extLst>
               </a:tr>
             </a:tbl>
           </a:graphicData>
@@ -9074,11 +9195,11 @@
           <a:bodyPr wrap="square" rtlCol="0" anchor="ctr"/>
           <a:lstStyle/>
           <a:p>
-            <a:pPr indent="0" marL="0">
-              <a:buNone/>
-            </a:pPr>
-            <a:r>
-              <a:rPr lang="en-US" sz="900" spc="200" kern="0" dirty="0">
+            <a:pPr marL="0" indent="0">
+              <a:buNone/>
+            </a:pPr>
+            <a:r>
+              <a:rPr lang="en-US" sz="900" kern="0" spc="200" dirty="0">
                 <a:solidFill>
                   <a:srgbClr val="7A8A95"/>
                 </a:solidFill>
@@ -9113,7 +9234,7 @@
           <a:bodyPr wrap="square" rtlCol="0" anchor="ctr"/>
           <a:lstStyle/>
           <a:p>
-            <a:pPr algn="r" indent="0" marL="0">
+            <a:pPr marL="0" indent="0" algn="r">
               <a:buNone/>
             </a:pPr>
             <a:r>
@@ -9432,4 +9553,319 @@
     </a:ext>
   </a:extLst>
 </a:theme>
+</file>
+
+<file path=ppt/theme/theme2.xml><?xml version="1.0" encoding="utf-8"?>
+<a:theme xmlns:a="http://schemas.openxmlformats.org/drawingml/2006/main" name="Office">
+  <a:themeElements>
+    <a:clrScheme name="Office">
+      <a:dk1>
+        <a:sysClr val="windowText" lastClr="000000"/>
+      </a:dk1>
+      <a:lt1>
+        <a:sysClr val="window" lastClr="FFFFFF"/>
+      </a:lt1>
+      <a:dk2>
+        <a:srgbClr val="0E2841"/>
+      </a:dk2>
+      <a:lt2>
+        <a:srgbClr val="E8E8E8"/>
+      </a:lt2>
+      <a:accent1>
+        <a:srgbClr val="156082"/>
+      </a:accent1>
+      <a:accent2>
+        <a:srgbClr val="E97132"/>
+      </a:accent2>
+      <a:accent3>
+        <a:srgbClr val="196B24"/>
+      </a:accent3>
+      <a:accent4>
+        <a:srgbClr val="0F9ED5"/>
+      </a:accent4>
+      <a:accent5>
+        <a:srgbClr val="A02B93"/>
+      </a:accent5>
+      <a:accent6>
+        <a:srgbClr val="4EA72E"/>
+      </a:accent6>
+      <a:hlink>
+        <a:srgbClr val="467886"/>
+      </a:hlink>
+      <a:folHlink>
+        <a:srgbClr val="96607D"/>
+      </a:folHlink>
+    </a:clrScheme>
+    <a:fontScheme name="Office">
+      <a:majorFont>
+        <a:latin typeface="Aptos Display" panose="02110004020202020204"/>
+        <a:ea typeface=""/>
+        <a:cs typeface=""/>
+        <a:font script="Jpan" typeface="游ゴシック Light"/>
+        <a:font script="Hang" typeface="맑은 고딕"/>
+        <a:font script="Hans" typeface="等线 Light"/>
+        <a:font script="Hant" typeface="新細明體"/>
+        <a:font script="Arab" typeface="Times New Roman"/>
+        <a:font script="Hebr" typeface="Times New Roman"/>
+        <a:font script="Thai" typeface="Angsana New"/>
+        <a:font script="Ethi" typeface="Nyala"/>
+        <a:font script="Beng" typeface="Vrinda"/>
+        <a:font script="Gujr" typeface="Shruti"/>
+        <a:font script="Khmr" typeface="MoolBoran"/>
+        <a:font script="Knda" typeface="Tunga"/>
+        <a:font script="Guru" typeface="Raavi"/>
+        <a:font script="Cans" typeface="Euphemia"/>
+        <a:font script="Cher" typeface="Plantagenet Cherokee"/>
+        <a:font script="Yiii" typeface="Microsoft Yi Baiti"/>
+        <a:font script="Tibt" typeface="Microsoft Himalaya"/>
+        <a:font script="Thaa" typeface="MV Boli"/>
+        <a:font script="Deva" typeface="Mangal"/>
+        <a:font script="Telu" typeface="Gautami"/>
+        <a:font script="Taml" typeface="Latha"/>
+        <a:font script="Syrc" typeface="Estrangelo Edessa"/>
+        <a:font script="Orya" typeface="Kalinga"/>
+        <a:font script="Mlym" typeface="Kartika"/>
+        <a:font script="Laoo" typeface="DokChampa"/>
+        <a:font script="Sinh" typeface="Iskoola Pota"/>
+        <a:font script="Mong" typeface="Mongolian Baiti"/>
+        <a:font script="Viet" typeface="Times New Roman"/>
+        <a:font script="Uigh" typeface="Microsoft Uighur"/>
+        <a:font script="Geor" typeface="Sylfaen"/>
+        <a:font script="Armn" typeface="Arial"/>
+        <a:font script="Bugi" typeface="Leelawadee UI"/>
+        <a:font script="Bopo" typeface="Microsoft JhengHei"/>
+        <a:font script="Java" typeface="Javanese Text"/>
+        <a:font script="Lisu" typeface="Segoe UI"/>
+        <a:font script="Mymr" typeface="Myanmar Text"/>
+        <a:font script="Nkoo" typeface="Ebrima"/>
+        <a:font script="Olck" typeface="Nirmala UI"/>
+        <a:font script="Osma" typeface="Ebrima"/>
+        <a:font script="Phag" typeface="Phagspa"/>
+        <a:font script="Syrn" typeface="Estrangelo Edessa"/>
+        <a:font script="Syrj" typeface="Estrangelo Edessa"/>
+        <a:font script="Syre" typeface="Estrangelo Edessa"/>
+        <a:font script="Sora" typeface="Nirmala UI"/>
+        <a:font script="Tale" typeface="Microsoft Tai Le"/>
+        <a:font script="Talu" typeface="Microsoft New Tai Lue"/>
+        <a:font script="Tfng" typeface="Ebrima"/>
+      </a:majorFont>
+      <a:minorFont>
+        <a:latin typeface="Aptos" panose="02110004020202020204"/>
+        <a:ea typeface=""/>
+        <a:cs typeface=""/>
+        <a:font script="Jpan" typeface="游ゴシック"/>
+        <a:font script="Hang" typeface="맑은 고딕"/>
+        <a:font script="Hans" typeface="等线"/>
+        <a:font script="Hant" typeface="新細明體"/>
+        <a:font script="Arab" typeface="Arial"/>
+        <a:font script="Hebr" typeface="Arial"/>
+        <a:font script="Thai" typeface="Cordia New"/>
+        <a:font script="Ethi" typeface="Nyala"/>
+        <a:font script="Beng" typeface="Vrinda"/>
+        <a:font script="Gujr" typeface="Shruti"/>
+        <a:font script="Khmr" typeface="DaunPenh"/>
+        <a:font script="Knda" typeface="Tunga"/>
+        <a:font script="Guru" typeface="Raavi"/>
+        <a:font script="Cans" typeface="Euphemia"/>
+        <a:font script="Cher" typeface="Plantagenet Cherokee"/>
+        <a:font script="Yiii" typeface="Microsoft Yi Baiti"/>
+        <a:font script="Tibt" typeface="Microsoft Himalaya"/>
+        <a:font script="Thaa" typeface="MV Boli"/>
+        <a:font script="Deva" typeface="Mangal"/>
+        <a:font script="Telu" typeface="Gautami"/>
+        <a:font script="Taml" typeface="Latha"/>
+        <a:font script="Syrc" typeface="Estrangelo Edessa"/>
+        <a:font script="Orya" typeface="Kalinga"/>
+        <a:font script="Mlym" typeface="Kartika"/>
+        <a:font script="Laoo" typeface="DokChampa"/>
+        <a:font script="Sinh" typeface="Iskoola Pota"/>
+        <a:font script="Mong" typeface="Mongolian Baiti"/>
+        <a:font script="Viet" typeface="Arial"/>
+        <a:font script="Uigh" typeface="Microsoft Uighur"/>
+        <a:font script="Geor" typeface="Sylfaen"/>
+        <a:font script="Armn" typeface="Arial"/>
+        <a:font script="Bugi" typeface="Leelawadee UI"/>
+        <a:font script="Bopo" typeface="Microsoft JhengHei"/>
+        <a:font script="Java" typeface="Javanese Text"/>
+        <a:font script="Lisu" typeface="Segoe UI"/>
+        <a:font script="Mymr" typeface="Myanmar Text"/>
+        <a:font script="Nkoo" typeface="Ebrima"/>
+        <a:font script="Olck" typeface="Nirmala UI"/>
+        <a:font script="Osma" typeface="Ebrima"/>
+        <a:font script="Phag" typeface="Phagspa"/>
+        <a:font script="Syrn" typeface="Estrangelo Edessa"/>
+        <a:font script="Syrj" typeface="Estrangelo Edessa"/>
+        <a:font script="Syre" typeface="Estrangelo Edessa"/>
+        <a:font script="Sora" typeface="Nirmala UI"/>
+        <a:font script="Tale" typeface="Microsoft Tai Le"/>
+        <a:font script="Talu" typeface="Microsoft New Tai Lue"/>
+        <a:font script="Tfng" typeface="Ebrima"/>
+      </a:minorFont>
+    </a:fontScheme>
+    <a:fmtScheme name="Office">
+      <a:fillStyleLst>
+        <a:solidFill>
+          <a:schemeClr val="phClr"/>
+        </a:solidFill>
+        <a:gradFill rotWithShape="1">
+          <a:gsLst>
+            <a:gs pos="0">
+              <a:schemeClr val="phClr">
+                <a:lumMod val="110000"/>
+                <a:satMod val="105000"/>
+                <a:tint val="67000"/>
+              </a:schemeClr>
+            </a:gs>
+            <a:gs pos="50000">
+              <a:schemeClr val="phClr">
+                <a:lumMod val="105000"/>
+                <a:satMod val="103000"/>
+                <a:tint val="73000"/>
+              </a:schemeClr>
+            </a:gs>
+            <a:gs pos="100000">
+              <a:schemeClr val="phClr">
+                <a:lumMod val="105000"/>
+                <a:satMod val="109000"/>
+                <a:tint val="81000"/>
+              </a:schemeClr>
+            </a:gs>
+          </a:gsLst>
+          <a:lin ang="5400000" scaled="0"/>
+        </a:gradFill>
+        <a:gradFill rotWithShape="1">
+          <a:gsLst>
+            <a:gs pos="0">
+              <a:schemeClr val="phClr">
+                <a:satMod val="103000"/>
+                <a:lumMod val="102000"/>
+                <a:tint val="94000"/>
+              </a:schemeClr>
+            </a:gs>
+            <a:gs pos="50000">
+              <a:schemeClr val="phClr">
+                <a:satMod val="110000"/>
+                <a:lumMod val="100000"/>
+                <a:shade val="100000"/>
+              </a:schemeClr>
+            </a:gs>
+            <a:gs pos="100000">
+              <a:schemeClr val="phClr">
+                <a:lumMod val="99000"/>
+                <a:satMod val="120000"/>
+                <a:shade val="78000"/>
+              </a:schemeClr>
+            </a:gs>
+          </a:gsLst>
+          <a:lin ang="5400000" scaled="0"/>
+        </a:gradFill>
+      </a:fillStyleLst>
+      <a:lnStyleLst>
+        <a:ln w="12700" cap="flat" cmpd="sng" algn="ctr">
+          <a:solidFill>
+            <a:schemeClr val="phClr"/>
+          </a:solidFill>
+          <a:prstDash val="solid"/>
+          <a:miter lim="800000"/>
+        </a:ln>
+        <a:ln w="19050" cap="flat" cmpd="sng" algn="ctr">
+          <a:solidFill>
+            <a:schemeClr val="phClr"/>
+          </a:solidFill>
+          <a:prstDash val="solid"/>
+          <a:miter lim="800000"/>
+        </a:ln>
+        <a:ln w="25400" cap="flat" cmpd="sng" algn="ctr">
+          <a:solidFill>
+            <a:schemeClr val="phClr"/>
+          </a:solidFill>
+          <a:prstDash val="solid"/>
+          <a:miter lim="800000"/>
+        </a:ln>
+      </a:lnStyleLst>
+      <a:effectStyleLst>
+        <a:effectStyle>
+          <a:effectLst/>
+        </a:effectStyle>
+        <a:effectStyle>
+          <a:effectLst/>
+        </a:effectStyle>
+        <a:effectStyle>
+          <a:effectLst>
+            <a:outerShdw blurRad="57150" dist="19050" dir="5400000" algn="ctr" rotWithShape="0">
+              <a:srgbClr val="000000">
+                <a:alpha val="63000"/>
+              </a:srgbClr>
+            </a:outerShdw>
+          </a:effectLst>
+        </a:effectStyle>
+      </a:effectStyleLst>
+      <a:bgFillStyleLst>
+        <a:solidFill>
+          <a:schemeClr val="phClr"/>
+        </a:solidFill>
+        <a:solidFill>
+          <a:schemeClr val="phClr">
+            <a:tint val="95000"/>
+            <a:satMod val="170000"/>
+          </a:schemeClr>
+        </a:solidFill>
+        <a:gradFill rotWithShape="1">
+          <a:gsLst>
+            <a:gs pos="0">
+              <a:schemeClr val="phClr">
+                <a:tint val="93000"/>
+                <a:satMod val="150000"/>
+                <a:shade val="98000"/>
+                <a:lumMod val="102000"/>
+              </a:schemeClr>
+            </a:gs>
+            <a:gs pos="50000">
+              <a:schemeClr val="phClr">
+                <a:tint val="98000"/>
+                <a:satMod val="130000"/>
+                <a:shade val="90000"/>
+                <a:lumMod val="103000"/>
+              </a:schemeClr>
+            </a:gs>
+            <a:gs pos="100000">
+              <a:schemeClr val="phClr">
+                <a:shade val="63000"/>
+                <a:satMod val="120000"/>
+              </a:schemeClr>
+            </a:gs>
+          </a:gsLst>
+          <a:lin ang="5400000" scaled="0"/>
+        </a:gradFill>
+      </a:bgFillStyleLst>
+    </a:fmtScheme>
+  </a:themeElements>
+  <a:objectDefaults>
+    <a:lnDef>
+      <a:spPr/>
+      <a:bodyPr/>
+      <a:lstStyle/>
+      <a:style>
+        <a:lnRef idx="2">
+          <a:schemeClr val="accent1"/>
+        </a:lnRef>
+        <a:fillRef idx="0">
+          <a:schemeClr val="accent1"/>
+        </a:fillRef>
+        <a:effectRef idx="1">
+          <a:schemeClr val="accent1"/>
+        </a:effectRef>
+        <a:fontRef idx="minor">
+          <a:schemeClr val="tx1"/>
+        </a:fontRef>
+      </a:style>
+    </a:lnDef>
+  </a:objectDefaults>
+  <a:extraClrSchemeLst/>
+  <a:extLst>
+    <a:ext uri="{05A4C25C-085E-4340-85A3-A5531E510DB2}">
+      <thm15:themeFamily xmlns:thm15="http://schemas.microsoft.com/office/thememl/2012/main" name="Office Theme" id="{2E142A2C-CD16-42D6-873A-C26D2A0506FA}" vid="{1BDDFF52-6CD6-40A5-AB3C-68EB2F1E4D0A}"/>
+    </a:ext>
+  </a:extLst>
+</a:theme>
 </file>